--- a/output/wordlabs-pack-3day.pptx
+++ b/output/wordlabs-pack-3day.pptx
@@ -4240,7 +4240,7 @@
                 <a:ea typeface="Calibri" pitchFamily="34" charset="-122"/>
                 <a:cs typeface="Calibri" pitchFamily="34" charset="-120"/>
               </a:rPr>
-              <a:t>"bundle, wrap, or group together"</a:t>
+              <a:t>"bundle, group, fill tightly"</a:t>
             </a:r>
             <a:endParaRPr lang="en-US" sz="2200" dirty="0"/>
           </a:p>
@@ -4279,7 +4279,7 @@
                 <a:ea typeface="Calibri" pitchFamily="34" charset="-122"/>
                 <a:cs typeface="Calibri" pitchFamily="34" charset="-120"/>
               </a:rPr>
-              <a:t>Origin: Latin: pactus</a:t>
+              <a:t>Origin: Latin: paccus</a:t>
             </a:r>
             <a:endParaRPr lang="en-US" sz="1300" dirty="0"/>
           </a:p>
@@ -5288,7 +5288,7 @@
                 <a:ea typeface="Calibri" pitchFamily="34" charset="-122"/>
                 <a:cs typeface="Calibri" pitchFamily="34" charset="-120"/>
               </a:rPr>
-              <a:t>Word Labs  •  wordlabs.app  •  Root: 'pack' = bundle, wrap, or group together</a:t>
+              <a:t>Word Labs  •  wordlabs.app  •  Root: 'pack' = bundle, group, fill tightly</a:t>
             </a:r>
             <a:endParaRPr lang="en-US" sz="800" dirty="0"/>
           </a:p>
@@ -5622,7 +5622,7 @@
                 <a:ea typeface="Trebuchet MS" pitchFamily="34" charset="-122"/>
                 <a:cs typeface="Trebuchet MS" pitchFamily="34" charset="-120"/>
               </a:rPr>
-              <a:t>1</a:t>
+              <a:t>0</a:t>
             </a:r>
             <a:pPr algn="ctr" indent="0" marL="0">
               <a:buNone/>
@@ -5928,7 +5928,7 @@
                 <a:ea typeface="Calibri" pitchFamily="34" charset="-122"/>
                 <a:cs typeface="Calibri" pitchFamily="34" charset="-120"/>
               </a:rPr>
-              <a:t>Word Labs  •  wordlabs.app  •  Root: 'pack' = bundle, wrap, or group together</a:t>
+              <a:t>Word Labs  •  wordlabs.app  •  Root: 'pack' = bundle, group, fill tightly</a:t>
             </a:r>
             <a:endParaRPr lang="en-US" sz="800" dirty="0"/>
           </a:p>
@@ -6040,7 +6040,7 @@
                 <a:ea typeface="Calibri" pitchFamily="34" charset="-122"/>
                 <a:cs typeface="Calibri" pitchFamily="34" charset="-120"/>
               </a:rPr>
-              <a:t>Before the camp, Jake had to </a:t>
+              <a:t>We need to </a:t>
             </a:r>
             <a:pPr algn="l" indent="0" marL="0">
               <a:buNone/>
@@ -6071,7 +6071,7 @@
                 <a:ea typeface="Calibri" pitchFamily="34" charset="-122"/>
                 <a:cs typeface="Calibri" pitchFamily="34" charset="-120"/>
               </a:rPr>
-              <a:t> his old </a:t>
+              <a:t> the boxes before we repack them into smaller </a:t>
             </a:r>
             <a:pPr algn="l" indent="0" marL="0">
               <a:buNone/>
@@ -6088,7 +6088,7 @@
                 <a:ea typeface="Calibri" pitchFamily="34" charset="-122"/>
                 <a:cs typeface="Calibri" pitchFamily="34" charset="-120"/>
               </a:rPr>
-              <a:t>backpack</a:t>
+              <a:t>packets</a:t>
             </a:r>
             <a:pPr algn="l" indent="0" marL="0">
               <a:buNone/>
@@ -6102,7 +6102,7 @@
                 <a:ea typeface="Calibri" pitchFamily="34" charset="-122"/>
                 <a:cs typeface="Calibri" pitchFamily="34" charset="-120"/>
               </a:rPr>
-              <a:t> and repack it with clean clothes.</a:t>
+              <a:t>.</a:t>
             </a:r>
             <a:endParaRPr lang="en-US" sz="1800" dirty="0"/>
           </a:p>
@@ -6385,7 +6385,7 @@
                 <a:ea typeface="Trebuchet MS" pitchFamily="34" charset="-122"/>
                 <a:cs typeface="Trebuchet MS" pitchFamily="34" charset="-120"/>
               </a:rPr>
-              <a:t>backpack</a:t>
+              <a:t>packets</a:t>
             </a:r>
             <a:endParaRPr lang="en-US" sz="1400" dirty="0"/>
           </a:p>
@@ -6716,7 +6716,7 @@
                 <a:ea typeface="Calibri" pitchFamily="34" charset="-122"/>
                 <a:cs typeface="Calibri" pitchFamily="34" charset="-120"/>
               </a:rPr>
-              <a:t>Word Labs  •  wordlabs.app  •  Root: 'pack' = bundle, wrap, or group together</a:t>
+              <a:t>Word Labs  •  wordlabs.app  •  Root: 'pack' = bundle, group, fill tightly</a:t>
             </a:r>
             <a:endParaRPr lang="en-US" sz="800" dirty="0"/>
           </a:p>
@@ -7543,7 +7543,7 @@
                 <a:ea typeface="Calibri" pitchFamily="34" charset="-122"/>
                 <a:cs typeface="Calibri" pitchFamily="34" charset="-120"/>
               </a:rPr>
-              <a:t>Word Labs  •  wordlabs.app  •  Root: 'pack' = bundle, wrap, or group together</a:t>
+              <a:t>Word Labs  •  wordlabs.app  •  Root: 'pack' = bundle, group, fill tightly</a:t>
             </a:r>
             <a:endParaRPr lang="en-US" sz="800" dirty="0"/>
           </a:p>
@@ -7972,7 +7972,7 @@
                 <a:ea typeface="Calibri" pitchFamily="34" charset="-122"/>
                 <a:cs typeface="Calibri" pitchFamily="34" charset="-120"/>
               </a:rPr>
-              <a:t>bundle or group together</a:t>
+              <a:t>bundle, fill tightly</a:t>
             </a:r>
             <a:endParaRPr lang="en-US" sz="850" dirty="0"/>
           </a:p>
@@ -8528,7 +8528,7 @@
                 <a:ea typeface="Calibri" pitchFamily="34" charset="-122"/>
                 <a:cs typeface="Calibri" pitchFamily="34" charset="-120"/>
               </a:rPr>
-              <a:t>Word Labs  •  wordlabs.app  •  Root: 'pack' = bundle, wrap, or group together</a:t>
+              <a:t>Word Labs  •  wordlabs.app  •  Root: 'pack' = bundle, group, fill tightly</a:t>
             </a:r>
             <a:endParaRPr lang="en-US" sz="800" dirty="0"/>
           </a:p>
@@ -8957,7 +8957,7 @@
                 <a:ea typeface="Calibri" pitchFamily="34" charset="-122"/>
                 <a:cs typeface="Calibri" pitchFamily="34" charset="-120"/>
               </a:rPr>
-              <a:t>bundle or group together</a:t>
+              <a:t>bundle, fill tightly</a:t>
             </a:r>
             <a:endParaRPr lang="en-US" sz="850" dirty="0"/>
           </a:p>
@@ -9645,7 +9645,7 @@
                 <a:ea typeface="Calibri" pitchFamily="34" charset="-122"/>
                 <a:cs typeface="Calibri" pitchFamily="34" charset="-120"/>
               </a:rPr>
-              <a:t>Word Labs  •  wordlabs.app  •  Root: 'pack' = bundle, wrap, or group together</a:t>
+              <a:t>Word Labs  •  wordlabs.app  •  Root: 'pack' = bundle, group, fill tightly</a:t>
             </a:r>
             <a:endParaRPr lang="en-US" sz="800" dirty="0"/>
           </a:p>
@@ -10074,7 +10074,7 @@
                 <a:ea typeface="Calibri" pitchFamily="34" charset="-122"/>
                 <a:cs typeface="Calibri" pitchFamily="34" charset="-120"/>
               </a:rPr>
-              <a:t>bundle or group together</a:t>
+              <a:t>bundle, fill tightly</a:t>
             </a:r>
             <a:endParaRPr lang="en-US" sz="850" dirty="0"/>
           </a:p>
@@ -11053,7 +11053,7 @@
                 <a:ea typeface="Calibri" pitchFamily="34" charset="-122"/>
                 <a:cs typeface="Calibri" pitchFamily="34" charset="-120"/>
               </a:rPr>
-              <a:t>Word Labs  •  wordlabs.app  •  Root: 'pack' = bundle, wrap, or group together</a:t>
+              <a:t>Word Labs  •  wordlabs.app  •  Root: 'pack' = bundle, group, fill tightly</a:t>
             </a:r>
             <a:endParaRPr lang="en-US" sz="800" dirty="0"/>
           </a:p>
@@ -11192,7 +11192,7 @@
                 <a:ea typeface="Trebuchet MS" pitchFamily="34" charset="-122"/>
                 <a:cs typeface="Trebuchet MS" pitchFamily="34" charset="-120"/>
               </a:rPr>
-              <a:t>backpack</a:t>
+              <a:t>packets</a:t>
             </a:r>
             <a:endParaRPr lang="en-US" sz="2800" dirty="0"/>
           </a:p>
@@ -11880,7 +11880,7 @@
                 <a:ea typeface="Calibri" pitchFamily="34" charset="-122"/>
                 <a:cs typeface="Calibri" pitchFamily="34" charset="-120"/>
               </a:rPr>
-              <a:t>Word Labs  •  wordlabs.app  •  Root: 'pack' = bundle, wrap, or group together</a:t>
+              <a:t>Word Labs  •  wordlabs.app  •  Root: 'pack' = bundle, group, fill tightly</a:t>
             </a:r>
             <a:endParaRPr lang="en-US" sz="800" dirty="0"/>
           </a:p>
@@ -12019,7 +12019,7 @@
                 <a:ea typeface="Trebuchet MS" pitchFamily="34" charset="-122"/>
                 <a:cs typeface="Trebuchet MS" pitchFamily="34" charset="-120"/>
               </a:rPr>
-              <a:t>backpack</a:t>
+              <a:t>packets</a:t>
             </a:r>
             <a:endParaRPr lang="en-US" sz="2800" dirty="0"/>
           </a:p>
@@ -12099,7 +12099,7 @@
         </p:nvSpPr>
         <p:spPr>
           <a:xfrm>
-            <a:off x="2938272" y="2258568"/>
+            <a:off x="2221992" y="2258568"/>
             <a:ext cx="1828800" cy="292608"/>
           </a:xfrm>
           <a:prstGeom prst="rect">
@@ -12108,11 +12108,11 @@
             </a:avLst>
           </a:prstGeom>
           <a:solidFill>
-            <a:srgbClr val="DDD6FE"/>
+            <a:srgbClr val="CCFBF1"/>
           </a:solidFill>
           <a:ln w="19050">
             <a:solidFill>
-              <a:srgbClr val="7C3AED"/>
+              <a:srgbClr val="0D9488"/>
             </a:solidFill>
             <a:prstDash val="solid"/>
           </a:ln>
@@ -12133,7 +12133,7 @@
         </p:nvSpPr>
         <p:spPr>
           <a:xfrm>
-            <a:off x="2938272" y="2258568"/>
+            <a:off x="2221992" y="2258568"/>
             <a:ext cx="1828800" cy="292608"/>
           </a:xfrm>
           <a:prstGeom prst="rect">
@@ -12152,13 +12152,13 @@
             <a:r>
               <a:rPr lang="en-US" sz="1300" b="1" dirty="0">
                 <a:solidFill>
-                  <a:srgbClr val="4C1D95"/>
+                  <a:srgbClr val="0F766E"/>
                 </a:solidFill>
                 <a:latin typeface="Trebuchet MS" pitchFamily="34" charset="0"/>
                 <a:ea typeface="Trebuchet MS" pitchFamily="34" charset="-122"/>
                 <a:cs typeface="Trebuchet MS" pitchFamily="34" charset="-120"/>
               </a:rPr>
-              <a:t>back</a:t>
+              <a:t>pack</a:t>
             </a:r>
             <a:endParaRPr lang="en-US" sz="1300" dirty="0"/>
           </a:p>
@@ -12172,7 +12172,7 @@
         </p:nvSpPr>
         <p:spPr>
           <a:xfrm>
-            <a:off x="2938272" y="2569464"/>
+            <a:off x="2221992" y="2569464"/>
             <a:ext cx="1828800" cy="201168"/>
           </a:xfrm>
           <a:prstGeom prst="rect">
@@ -12197,7 +12197,7 @@
                 <a:ea typeface="Calibri" pitchFamily="34" charset="-122"/>
                 <a:cs typeface="Calibri" pitchFamily="34" charset="-120"/>
               </a:rPr>
-              <a:t>rear, behind</a:t>
+              <a:t>bundle, fill tightly</a:t>
             </a:r>
             <a:endParaRPr lang="en-US" sz="850" dirty="0"/>
           </a:p>
@@ -12211,7 +12211,7 @@
         </p:nvSpPr>
         <p:spPr>
           <a:xfrm>
-            <a:off x="5803392" y="2258568"/>
+            <a:off x="4370832" y="2258568"/>
             <a:ext cx="1828800" cy="292608"/>
           </a:xfrm>
           <a:prstGeom prst="rect">
@@ -12220,11 +12220,11 @@
             </a:avLst>
           </a:prstGeom>
           <a:solidFill>
-            <a:srgbClr val="CCFBF1"/>
+            <a:srgbClr val="DDD6FE"/>
           </a:solidFill>
           <a:ln w="19050">
             <a:solidFill>
-              <a:srgbClr val="0D9488"/>
+              <a:srgbClr val="7C3AED"/>
             </a:solidFill>
             <a:prstDash val="solid"/>
           </a:ln>
@@ -12245,7 +12245,7 @@
         </p:nvSpPr>
         <p:spPr>
           <a:xfrm>
-            <a:off x="5803392" y="2258568"/>
+            <a:off x="4370832" y="2258568"/>
             <a:ext cx="1828800" cy="292608"/>
           </a:xfrm>
           <a:prstGeom prst="rect">
@@ -12264,13 +12264,13 @@
             <a:r>
               <a:rPr lang="en-US" sz="1300" b="1" dirty="0">
                 <a:solidFill>
-                  <a:srgbClr val="0F766E"/>
+                  <a:srgbClr val="4C1D95"/>
                 </a:solidFill>
                 <a:latin typeface="Trebuchet MS" pitchFamily="34" charset="0"/>
                 <a:ea typeface="Trebuchet MS" pitchFamily="34" charset="-122"/>
                 <a:cs typeface="Trebuchet MS" pitchFamily="34" charset="-120"/>
               </a:rPr>
-              <a:t>pack</a:t>
+              <a:t>et</a:t>
             </a:r>
             <a:endParaRPr lang="en-US" sz="1300" dirty="0"/>
           </a:p>
@@ -12284,7 +12284,7 @@
         </p:nvSpPr>
         <p:spPr>
           <a:xfrm>
-            <a:off x="5803392" y="2569464"/>
+            <a:off x="4370832" y="2569464"/>
             <a:ext cx="1828800" cy="201168"/>
           </a:xfrm>
           <a:prstGeom prst="rect">
@@ -12309,7 +12309,7 @@
                 <a:ea typeface="Calibri" pitchFamily="34" charset="-122"/>
                 <a:cs typeface="Calibri" pitchFamily="34" charset="-120"/>
               </a:rPr>
-              <a:t>bundle or group together</a:t>
+              <a:t>small</a:t>
             </a:r>
             <a:endParaRPr lang="en-US" sz="850" dirty="0"/>
           </a:p>
@@ -12318,6 +12318,118 @@
       <p:sp>
         <p:nvSpPr>
           <p:cNvPr id="22" name="Shape 20"/>
+          <p:cNvSpPr/>
+          <p:nvPr/>
+        </p:nvSpPr>
+        <p:spPr>
+          <a:xfrm>
+            <a:off x="6519672" y="2258568"/>
+            <a:ext cx="1828800" cy="292608"/>
+          </a:xfrm>
+          <a:prstGeom prst="rect">
+            <a:avLst>
+              <a:gd name="adj" fmla="val 25000"/>
+            </a:avLst>
+          </a:prstGeom>
+          <a:solidFill>
+            <a:srgbClr val="FCE7F3"/>
+          </a:solidFill>
+          <a:ln w="19050">
+            <a:solidFill>
+              <a:srgbClr val="DB2777"/>
+            </a:solidFill>
+            <a:prstDash val="solid"/>
+          </a:ln>
+          <a:effectLst>
+            <a:outerShdw sx="100000" sy="100000" kx="0" ky="0" algn="bl" rotWithShape="0" blurRad="101600" dist="38100" dir="8100000">
+              <a:srgbClr val="000000">
+                <a:alpha val="12000"/>
+              </a:srgbClr>
+            </a:outerShdw>
+          </a:effectLst>
+        </p:spPr>
+      </p:sp>
+      <p:sp>
+        <p:nvSpPr>
+          <p:cNvPr id="23" name="Text 21"/>
+          <p:cNvSpPr/>
+          <p:nvPr/>
+        </p:nvSpPr>
+        <p:spPr>
+          <a:xfrm>
+            <a:off x="6519672" y="2258568"/>
+            <a:ext cx="1828800" cy="292608"/>
+          </a:xfrm>
+          <a:prstGeom prst="rect">
+            <a:avLst/>
+          </a:prstGeom>
+          <a:noFill/>
+          <a:ln/>
+        </p:spPr>
+        <p:txBody>
+          <a:bodyPr wrap="square" lIns="0" tIns="0" rIns="0" bIns="0" rtlCol="0" anchor="ctr"/>
+          <a:lstStyle/>
+          <a:p>
+            <a:pPr algn="ctr" indent="0" marL="0">
+              <a:buNone/>
+            </a:pPr>
+            <a:r>
+              <a:rPr lang="en-US" sz="1300" b="1" dirty="0">
+                <a:solidFill>
+                  <a:srgbClr val="9D174D"/>
+                </a:solidFill>
+                <a:latin typeface="Trebuchet MS" pitchFamily="34" charset="0"/>
+                <a:ea typeface="Trebuchet MS" pitchFamily="34" charset="-122"/>
+                <a:cs typeface="Trebuchet MS" pitchFamily="34" charset="-120"/>
+              </a:rPr>
+              <a:t>s</a:t>
+            </a:r>
+            <a:endParaRPr lang="en-US" sz="1300" dirty="0"/>
+          </a:p>
+        </p:txBody>
+      </p:sp>
+      <p:sp>
+        <p:nvSpPr>
+          <p:cNvPr id="24" name="Text 22"/>
+          <p:cNvSpPr/>
+          <p:nvPr/>
+        </p:nvSpPr>
+        <p:spPr>
+          <a:xfrm>
+            <a:off x="6519672" y="2569464"/>
+            <a:ext cx="1828800" cy="201168"/>
+          </a:xfrm>
+          <a:prstGeom prst="rect">
+            <a:avLst/>
+          </a:prstGeom>
+          <a:noFill/>
+          <a:ln/>
+        </p:spPr>
+        <p:txBody>
+          <a:bodyPr wrap="square" lIns="0" tIns="0" rIns="0" bIns="0" rtlCol="0" anchor="t"/>
+          <a:lstStyle/>
+          <a:p>
+            <a:pPr algn="ctr" indent="0" marL="0">
+              <a:buNone/>
+            </a:pPr>
+            <a:r>
+              <a:rPr lang="en-US" sz="850" dirty="0">
+                <a:solidFill>
+                  <a:srgbClr val="475569"/>
+                </a:solidFill>
+                <a:latin typeface="Calibri" pitchFamily="34" charset="0"/>
+                <a:ea typeface="Calibri" pitchFamily="34" charset="-122"/>
+                <a:cs typeface="Calibri" pitchFamily="34" charset="-120"/>
+              </a:rPr>
+              <a:t>more than one</a:t>
+            </a:r>
+            <a:endParaRPr lang="en-US" sz="850" dirty="0"/>
+          </a:p>
+        </p:txBody>
+      </p:sp>
+      <p:sp>
+        <p:nvSpPr>
+          <p:cNvPr id="25" name="Shape 23"/>
           <p:cNvSpPr/>
           <p:nvPr/>
         </p:nvSpPr>
@@ -12344,7 +12456,7 @@
       </p:sp>
       <p:sp>
         <p:nvSpPr>
-          <p:cNvPr id="23" name="Text 21"/>
+          <p:cNvPr id="26" name="Text 24"/>
           <p:cNvSpPr/>
           <p:nvPr/>
         </p:nvSpPr>
@@ -12383,7 +12495,7 @@
       </p:sp>
       <p:sp>
         <p:nvSpPr>
-          <p:cNvPr id="24" name="Shape 22"/>
+          <p:cNvPr id="27" name="Shape 25"/>
           <p:cNvSpPr/>
           <p:nvPr/>
         </p:nvSpPr>
@@ -12410,7 +12522,7 @@
       </p:sp>
       <p:sp>
         <p:nvSpPr>
-          <p:cNvPr id="25" name="Text 23"/>
+          <p:cNvPr id="28" name="Text 26"/>
           <p:cNvSpPr/>
           <p:nvPr/>
         </p:nvSpPr>
@@ -12449,7 +12561,7 @@
       </p:sp>
       <p:sp>
         <p:nvSpPr>
-          <p:cNvPr id="26" name="Shape 24"/>
+          <p:cNvPr id="29" name="Shape 27"/>
           <p:cNvSpPr/>
           <p:nvPr/>
         </p:nvSpPr>
@@ -12476,7 +12588,7 @@
       </p:sp>
       <p:sp>
         <p:nvSpPr>
-          <p:cNvPr id="27" name="Text 25"/>
+          <p:cNvPr id="30" name="Text 28"/>
           <p:cNvSpPr/>
           <p:nvPr/>
         </p:nvSpPr>
@@ -12515,7 +12627,7 @@
       </p:sp>
       <p:sp>
         <p:nvSpPr>
-          <p:cNvPr id="28" name="Shape 26"/>
+          <p:cNvPr id="31" name="Shape 29"/>
           <p:cNvSpPr/>
           <p:nvPr/>
         </p:nvSpPr>
@@ -12542,7 +12654,7 @@
       </p:sp>
       <p:sp>
         <p:nvSpPr>
-          <p:cNvPr id="29" name="Text 27"/>
+          <p:cNvPr id="32" name="Text 30"/>
           <p:cNvSpPr/>
           <p:nvPr/>
         </p:nvSpPr>
@@ -12865,7 +12977,7 @@
                 <a:ea typeface="Calibri" pitchFamily="34" charset="-122"/>
                 <a:cs typeface="Calibri" pitchFamily="34" charset="-120"/>
               </a:rPr>
-              <a:t>Word Labs  •  wordlabs.app  •  Root: 'pack' = bundle, wrap, or group together</a:t>
+              <a:t>Word Labs  •  wordlabs.app  •  Root: 'pack' = bundle, group, fill tightly</a:t>
             </a:r>
             <a:endParaRPr lang="en-US" sz="800" dirty="0"/>
           </a:p>
@@ -13004,7 +13116,7 @@
                 <a:ea typeface="Trebuchet MS" pitchFamily="34" charset="-122"/>
                 <a:cs typeface="Trebuchet MS" pitchFamily="34" charset="-120"/>
               </a:rPr>
-              <a:t>backpack</a:t>
+              <a:t>packets</a:t>
             </a:r>
             <a:endParaRPr lang="en-US" sz="2800" dirty="0"/>
           </a:p>
@@ -13084,7 +13196,7 @@
         </p:nvSpPr>
         <p:spPr>
           <a:xfrm>
-            <a:off x="2938272" y="2258568"/>
+            <a:off x="2221992" y="2258568"/>
             <a:ext cx="1828800" cy="292608"/>
           </a:xfrm>
           <a:prstGeom prst="rect">
@@ -13093,11 +13205,11 @@
             </a:avLst>
           </a:prstGeom>
           <a:solidFill>
-            <a:srgbClr val="DDD6FE"/>
+            <a:srgbClr val="CCFBF1"/>
           </a:solidFill>
           <a:ln w="19050">
             <a:solidFill>
-              <a:srgbClr val="7C3AED"/>
+              <a:srgbClr val="0D9488"/>
             </a:solidFill>
             <a:prstDash val="solid"/>
           </a:ln>
@@ -13118,7 +13230,7 @@
         </p:nvSpPr>
         <p:spPr>
           <a:xfrm>
-            <a:off x="2938272" y="2258568"/>
+            <a:off x="2221992" y="2258568"/>
             <a:ext cx="1828800" cy="292608"/>
           </a:xfrm>
           <a:prstGeom prst="rect">
@@ -13137,13 +13249,13 @@
             <a:r>
               <a:rPr lang="en-US" sz="1300" b="1" dirty="0">
                 <a:solidFill>
-                  <a:srgbClr val="4C1D95"/>
+                  <a:srgbClr val="0F766E"/>
                 </a:solidFill>
                 <a:latin typeface="Trebuchet MS" pitchFamily="34" charset="0"/>
                 <a:ea typeface="Trebuchet MS" pitchFamily="34" charset="-122"/>
                 <a:cs typeface="Trebuchet MS" pitchFamily="34" charset="-120"/>
               </a:rPr>
-              <a:t>back</a:t>
+              <a:t>pack</a:t>
             </a:r>
             <a:endParaRPr lang="en-US" sz="1300" dirty="0"/>
           </a:p>
@@ -13157,7 +13269,7 @@
         </p:nvSpPr>
         <p:spPr>
           <a:xfrm>
-            <a:off x="2938272" y="2569464"/>
+            <a:off x="2221992" y="2569464"/>
             <a:ext cx="1828800" cy="201168"/>
           </a:xfrm>
           <a:prstGeom prst="rect">
@@ -13182,7 +13294,7 @@
                 <a:ea typeface="Calibri" pitchFamily="34" charset="-122"/>
                 <a:cs typeface="Calibri" pitchFamily="34" charset="-120"/>
               </a:rPr>
-              <a:t>rear, behind</a:t>
+              <a:t>bundle, fill tightly</a:t>
             </a:r>
             <a:endParaRPr lang="en-US" sz="850" dirty="0"/>
           </a:p>
@@ -13196,7 +13308,7 @@
         </p:nvSpPr>
         <p:spPr>
           <a:xfrm>
-            <a:off x="5803392" y="2258568"/>
+            <a:off x="4370832" y="2258568"/>
             <a:ext cx="1828800" cy="292608"/>
           </a:xfrm>
           <a:prstGeom prst="rect">
@@ -13205,11 +13317,11 @@
             </a:avLst>
           </a:prstGeom>
           <a:solidFill>
-            <a:srgbClr val="CCFBF1"/>
+            <a:srgbClr val="DDD6FE"/>
           </a:solidFill>
           <a:ln w="19050">
             <a:solidFill>
-              <a:srgbClr val="0D9488"/>
+              <a:srgbClr val="7C3AED"/>
             </a:solidFill>
             <a:prstDash val="solid"/>
           </a:ln>
@@ -13230,7 +13342,7 @@
         </p:nvSpPr>
         <p:spPr>
           <a:xfrm>
-            <a:off x="5803392" y="2258568"/>
+            <a:off x="4370832" y="2258568"/>
             <a:ext cx="1828800" cy="292608"/>
           </a:xfrm>
           <a:prstGeom prst="rect">
@@ -13249,13 +13361,13 @@
             <a:r>
               <a:rPr lang="en-US" sz="1300" b="1" dirty="0">
                 <a:solidFill>
-                  <a:srgbClr val="0F766E"/>
+                  <a:srgbClr val="4C1D95"/>
                 </a:solidFill>
                 <a:latin typeface="Trebuchet MS" pitchFamily="34" charset="0"/>
                 <a:ea typeface="Trebuchet MS" pitchFamily="34" charset="-122"/>
                 <a:cs typeface="Trebuchet MS" pitchFamily="34" charset="-120"/>
               </a:rPr>
-              <a:t>pack</a:t>
+              <a:t>et</a:t>
             </a:r>
             <a:endParaRPr lang="en-US" sz="1300" dirty="0"/>
           </a:p>
@@ -13269,7 +13381,7 @@
         </p:nvSpPr>
         <p:spPr>
           <a:xfrm>
-            <a:off x="5803392" y="2569464"/>
+            <a:off x="4370832" y="2569464"/>
             <a:ext cx="1828800" cy="201168"/>
           </a:xfrm>
           <a:prstGeom prst="rect">
@@ -13294,7 +13406,7 @@
                 <a:ea typeface="Calibri" pitchFamily="34" charset="-122"/>
                 <a:cs typeface="Calibri" pitchFamily="34" charset="-120"/>
               </a:rPr>
-              <a:t>bundle or group together</a:t>
+              <a:t>small</a:t>
             </a:r>
             <a:endParaRPr lang="en-US" sz="850" dirty="0"/>
           </a:p>
@@ -13303,6 +13415,118 @@
       <p:sp>
         <p:nvSpPr>
           <p:cNvPr id="22" name="Shape 20"/>
+          <p:cNvSpPr/>
+          <p:nvPr/>
+        </p:nvSpPr>
+        <p:spPr>
+          <a:xfrm>
+            <a:off x="6519672" y="2258568"/>
+            <a:ext cx="1828800" cy="292608"/>
+          </a:xfrm>
+          <a:prstGeom prst="rect">
+            <a:avLst>
+              <a:gd name="adj" fmla="val 25000"/>
+            </a:avLst>
+          </a:prstGeom>
+          <a:solidFill>
+            <a:srgbClr val="FCE7F3"/>
+          </a:solidFill>
+          <a:ln w="19050">
+            <a:solidFill>
+              <a:srgbClr val="DB2777"/>
+            </a:solidFill>
+            <a:prstDash val="solid"/>
+          </a:ln>
+          <a:effectLst>
+            <a:outerShdw sx="100000" sy="100000" kx="0" ky="0" algn="bl" rotWithShape="0" blurRad="101600" dist="38100" dir="8100000">
+              <a:srgbClr val="000000">
+                <a:alpha val="12000"/>
+              </a:srgbClr>
+            </a:outerShdw>
+          </a:effectLst>
+        </p:spPr>
+      </p:sp>
+      <p:sp>
+        <p:nvSpPr>
+          <p:cNvPr id="23" name="Text 21"/>
+          <p:cNvSpPr/>
+          <p:nvPr/>
+        </p:nvSpPr>
+        <p:spPr>
+          <a:xfrm>
+            <a:off x="6519672" y="2258568"/>
+            <a:ext cx="1828800" cy="292608"/>
+          </a:xfrm>
+          <a:prstGeom prst="rect">
+            <a:avLst/>
+          </a:prstGeom>
+          <a:noFill/>
+          <a:ln/>
+        </p:spPr>
+        <p:txBody>
+          <a:bodyPr wrap="square" lIns="0" tIns="0" rIns="0" bIns="0" rtlCol="0" anchor="ctr"/>
+          <a:lstStyle/>
+          <a:p>
+            <a:pPr algn="ctr" indent="0" marL="0">
+              <a:buNone/>
+            </a:pPr>
+            <a:r>
+              <a:rPr lang="en-US" sz="1300" b="1" dirty="0">
+                <a:solidFill>
+                  <a:srgbClr val="9D174D"/>
+                </a:solidFill>
+                <a:latin typeface="Trebuchet MS" pitchFamily="34" charset="0"/>
+                <a:ea typeface="Trebuchet MS" pitchFamily="34" charset="-122"/>
+                <a:cs typeface="Trebuchet MS" pitchFamily="34" charset="-120"/>
+              </a:rPr>
+              <a:t>s</a:t>
+            </a:r>
+            <a:endParaRPr lang="en-US" sz="1300" dirty="0"/>
+          </a:p>
+        </p:txBody>
+      </p:sp>
+      <p:sp>
+        <p:nvSpPr>
+          <p:cNvPr id="24" name="Text 22"/>
+          <p:cNvSpPr/>
+          <p:nvPr/>
+        </p:nvSpPr>
+        <p:spPr>
+          <a:xfrm>
+            <a:off x="6519672" y="2569464"/>
+            <a:ext cx="1828800" cy="201168"/>
+          </a:xfrm>
+          <a:prstGeom prst="rect">
+            <a:avLst/>
+          </a:prstGeom>
+          <a:noFill/>
+          <a:ln/>
+        </p:spPr>
+        <p:txBody>
+          <a:bodyPr wrap="square" lIns="0" tIns="0" rIns="0" bIns="0" rtlCol="0" anchor="t"/>
+          <a:lstStyle/>
+          <a:p>
+            <a:pPr algn="ctr" indent="0" marL="0">
+              <a:buNone/>
+            </a:pPr>
+            <a:r>
+              <a:rPr lang="en-US" sz="850" dirty="0">
+                <a:solidFill>
+                  <a:srgbClr val="475569"/>
+                </a:solidFill>
+                <a:latin typeface="Calibri" pitchFamily="34" charset="0"/>
+                <a:ea typeface="Calibri" pitchFamily="34" charset="-122"/>
+                <a:cs typeface="Calibri" pitchFamily="34" charset="-120"/>
+              </a:rPr>
+              <a:t>more than one</a:t>
+            </a:r>
+            <a:endParaRPr lang="en-US" sz="850" dirty="0"/>
+          </a:p>
+        </p:txBody>
+      </p:sp>
+      <p:sp>
+        <p:nvSpPr>
+          <p:cNvPr id="25" name="Shape 23"/>
           <p:cNvSpPr/>
           <p:nvPr/>
         </p:nvSpPr>
@@ -13329,7 +13553,7 @@
       </p:sp>
       <p:sp>
         <p:nvSpPr>
-          <p:cNvPr id="23" name="Text 21"/>
+          <p:cNvPr id="26" name="Text 24"/>
           <p:cNvSpPr/>
           <p:nvPr/>
         </p:nvSpPr>
@@ -13368,7 +13592,7 @@
       </p:sp>
       <p:sp>
         <p:nvSpPr>
-          <p:cNvPr id="24" name="Shape 22"/>
+          <p:cNvPr id="27" name="Shape 25"/>
           <p:cNvSpPr/>
           <p:nvPr/>
         </p:nvSpPr>
@@ -13395,7 +13619,7 @@
       </p:sp>
       <p:sp>
         <p:nvSpPr>
-          <p:cNvPr id="25" name="Shape 23"/>
+          <p:cNvPr id="28" name="Shape 26"/>
           <p:cNvSpPr/>
           <p:nvPr/>
         </p:nvSpPr>
@@ -13422,7 +13646,7 @@
       </p:sp>
       <p:sp>
         <p:nvSpPr>
-          <p:cNvPr id="26" name="Text 24"/>
+          <p:cNvPr id="29" name="Text 27"/>
           <p:cNvSpPr/>
           <p:nvPr/>
         </p:nvSpPr>
@@ -13453,7 +13677,7 @@
                 <a:ea typeface="Trebuchet MS" pitchFamily="34" charset="-122"/>
                 <a:cs typeface="Trebuchet MS" pitchFamily="34" charset="-120"/>
               </a:rPr>
-              <a:t>back</a:t>
+              <a:t>pack</a:t>
             </a:r>
             <a:endParaRPr lang="en-US" sz="1400" dirty="0"/>
           </a:p>
@@ -13461,7 +13685,7 @@
       </p:sp>
       <p:sp>
         <p:nvSpPr>
-          <p:cNvPr id="27" name="Text 25"/>
+          <p:cNvPr id="30" name="Text 28"/>
           <p:cNvSpPr/>
           <p:nvPr/>
         </p:nvSpPr>
@@ -13500,7 +13724,7 @@
       </p:sp>
       <p:sp>
         <p:nvSpPr>
-          <p:cNvPr id="28" name="Shape 26"/>
+          <p:cNvPr id="31" name="Shape 29"/>
           <p:cNvSpPr/>
           <p:nvPr/>
         </p:nvSpPr>
@@ -13527,7 +13751,7 @@
       </p:sp>
       <p:sp>
         <p:nvSpPr>
-          <p:cNvPr id="29" name="Text 27"/>
+          <p:cNvPr id="32" name="Text 30"/>
           <p:cNvSpPr/>
           <p:nvPr/>
         </p:nvSpPr>
@@ -13558,7 +13782,7 @@
                 <a:ea typeface="Trebuchet MS" pitchFamily="34" charset="-122"/>
                 <a:cs typeface="Trebuchet MS" pitchFamily="34" charset="-120"/>
               </a:rPr>
-              <a:t>pack</a:t>
+              <a:t>ets</a:t>
             </a:r>
             <a:endParaRPr lang="en-US" sz="1400" dirty="0"/>
           </a:p>
@@ -13566,7 +13790,7 @@
       </p:sp>
       <p:sp>
         <p:nvSpPr>
-          <p:cNvPr id="30" name="Shape 28"/>
+          <p:cNvPr id="33" name="Shape 31"/>
           <p:cNvSpPr/>
           <p:nvPr/>
         </p:nvSpPr>
@@ -13593,7 +13817,7 @@
       </p:sp>
       <p:sp>
         <p:nvSpPr>
-          <p:cNvPr id="31" name="Text 29"/>
+          <p:cNvPr id="34" name="Text 32"/>
           <p:cNvSpPr/>
           <p:nvPr/>
         </p:nvSpPr>
@@ -13632,7 +13856,7 @@
       </p:sp>
       <p:sp>
         <p:nvSpPr>
-          <p:cNvPr id="32" name="Shape 30"/>
+          <p:cNvPr id="35" name="Shape 33"/>
           <p:cNvSpPr/>
           <p:nvPr/>
         </p:nvSpPr>
@@ -13659,7 +13883,7 @@
       </p:sp>
       <p:sp>
         <p:nvSpPr>
-          <p:cNvPr id="33" name="Text 31"/>
+          <p:cNvPr id="36" name="Text 34"/>
           <p:cNvSpPr/>
           <p:nvPr/>
         </p:nvSpPr>
@@ -13891,7 +14115,7 @@
                 <a:ea typeface="Calibri" pitchFamily="34" charset="-122"/>
                 <a:cs typeface="Calibri" pitchFamily="34" charset="-120"/>
               </a:rPr>
-              <a:t>Root 'pack' — bundle, wrap, or group together</a:t>
+              <a:t>Root 'pack' — bundle, group, fill tightly</a:t>
             </a:r>
             <a:endParaRPr lang="en-US" sz="1600" dirty="0"/>
           </a:p>
@@ -14247,7 +14471,7 @@
                 <a:ea typeface="Calibri" pitchFamily="34" charset="-122"/>
                 <a:cs typeface="Calibri" pitchFamily="34" charset="-120"/>
               </a:rPr>
-              <a:t>Word Labs  •  wordlabs.app  •  Root: 'pack' = bundle, wrap, or group together</a:t>
+              <a:t>Word Labs  •  wordlabs.app  •  Root: 'pack' = bundle, group, fill tightly</a:t>
             </a:r>
             <a:endParaRPr lang="en-US" sz="800" dirty="0"/>
           </a:p>
@@ -14386,7 +14610,7 @@
                 <a:ea typeface="Trebuchet MS" pitchFamily="34" charset="-122"/>
                 <a:cs typeface="Trebuchet MS" pitchFamily="34" charset="-120"/>
               </a:rPr>
-              <a:t>backpack</a:t>
+              <a:t>packets</a:t>
             </a:r>
             <a:endParaRPr lang="en-US" sz="2800" dirty="0"/>
           </a:p>
@@ -14466,7 +14690,7 @@
         </p:nvSpPr>
         <p:spPr>
           <a:xfrm>
-            <a:off x="2938272" y="2258568"/>
+            <a:off x="2221992" y="2258568"/>
             <a:ext cx="1828800" cy="292608"/>
           </a:xfrm>
           <a:prstGeom prst="rect">
@@ -14475,11 +14699,11 @@
             </a:avLst>
           </a:prstGeom>
           <a:solidFill>
-            <a:srgbClr val="DDD6FE"/>
+            <a:srgbClr val="CCFBF1"/>
           </a:solidFill>
           <a:ln w="19050">
             <a:solidFill>
-              <a:srgbClr val="7C3AED"/>
+              <a:srgbClr val="0D9488"/>
             </a:solidFill>
             <a:prstDash val="solid"/>
           </a:ln>
@@ -14500,7 +14724,7 @@
         </p:nvSpPr>
         <p:spPr>
           <a:xfrm>
-            <a:off x="2938272" y="2258568"/>
+            <a:off x="2221992" y="2258568"/>
             <a:ext cx="1828800" cy="292608"/>
           </a:xfrm>
           <a:prstGeom prst="rect">
@@ -14519,13 +14743,13 @@
             <a:r>
               <a:rPr lang="en-US" sz="1300" b="1" dirty="0">
                 <a:solidFill>
-                  <a:srgbClr val="4C1D95"/>
+                  <a:srgbClr val="0F766E"/>
                 </a:solidFill>
                 <a:latin typeface="Trebuchet MS" pitchFamily="34" charset="0"/>
                 <a:ea typeface="Trebuchet MS" pitchFamily="34" charset="-122"/>
                 <a:cs typeface="Trebuchet MS" pitchFamily="34" charset="-120"/>
               </a:rPr>
-              <a:t>back</a:t>
+              <a:t>pack</a:t>
             </a:r>
             <a:endParaRPr lang="en-US" sz="1300" dirty="0"/>
           </a:p>
@@ -14539,7 +14763,7 @@
         </p:nvSpPr>
         <p:spPr>
           <a:xfrm>
-            <a:off x="2938272" y="2569464"/>
+            <a:off x="2221992" y="2569464"/>
             <a:ext cx="1828800" cy="201168"/>
           </a:xfrm>
           <a:prstGeom prst="rect">
@@ -14564,7 +14788,7 @@
                 <a:ea typeface="Calibri" pitchFamily="34" charset="-122"/>
                 <a:cs typeface="Calibri" pitchFamily="34" charset="-120"/>
               </a:rPr>
-              <a:t>rear, behind</a:t>
+              <a:t>bundle, fill tightly</a:t>
             </a:r>
             <a:endParaRPr lang="en-US" sz="850" dirty="0"/>
           </a:p>
@@ -14578,7 +14802,7 @@
         </p:nvSpPr>
         <p:spPr>
           <a:xfrm>
-            <a:off x="5803392" y="2258568"/>
+            <a:off x="4370832" y="2258568"/>
             <a:ext cx="1828800" cy="292608"/>
           </a:xfrm>
           <a:prstGeom prst="rect">
@@ -14587,11 +14811,11 @@
             </a:avLst>
           </a:prstGeom>
           <a:solidFill>
-            <a:srgbClr val="CCFBF1"/>
+            <a:srgbClr val="DDD6FE"/>
           </a:solidFill>
           <a:ln w="19050">
             <a:solidFill>
-              <a:srgbClr val="0D9488"/>
+              <a:srgbClr val="7C3AED"/>
             </a:solidFill>
             <a:prstDash val="solid"/>
           </a:ln>
@@ -14612,7 +14836,7 @@
         </p:nvSpPr>
         <p:spPr>
           <a:xfrm>
-            <a:off x="5803392" y="2258568"/>
+            <a:off x="4370832" y="2258568"/>
             <a:ext cx="1828800" cy="292608"/>
           </a:xfrm>
           <a:prstGeom prst="rect">
@@ -14631,13 +14855,13 @@
             <a:r>
               <a:rPr lang="en-US" sz="1300" b="1" dirty="0">
                 <a:solidFill>
-                  <a:srgbClr val="0F766E"/>
+                  <a:srgbClr val="4C1D95"/>
                 </a:solidFill>
                 <a:latin typeface="Trebuchet MS" pitchFamily="34" charset="0"/>
                 <a:ea typeface="Trebuchet MS" pitchFamily="34" charset="-122"/>
                 <a:cs typeface="Trebuchet MS" pitchFamily="34" charset="-120"/>
               </a:rPr>
-              <a:t>pack</a:t>
+              <a:t>et</a:t>
             </a:r>
             <a:endParaRPr lang="en-US" sz="1300" dirty="0"/>
           </a:p>
@@ -14651,7 +14875,7 @@
         </p:nvSpPr>
         <p:spPr>
           <a:xfrm>
-            <a:off x="5803392" y="2569464"/>
+            <a:off x="4370832" y="2569464"/>
             <a:ext cx="1828800" cy="201168"/>
           </a:xfrm>
           <a:prstGeom prst="rect">
@@ -14676,7 +14900,7 @@
                 <a:ea typeface="Calibri" pitchFamily="34" charset="-122"/>
                 <a:cs typeface="Calibri" pitchFamily="34" charset="-120"/>
               </a:rPr>
-              <a:t>bundle or group together</a:t>
+              <a:t>small</a:t>
             </a:r>
             <a:endParaRPr lang="en-US" sz="850" dirty="0"/>
           </a:p>
@@ -14685,6 +14909,118 @@
       <p:sp>
         <p:nvSpPr>
           <p:cNvPr id="22" name="Shape 20"/>
+          <p:cNvSpPr/>
+          <p:nvPr/>
+        </p:nvSpPr>
+        <p:spPr>
+          <a:xfrm>
+            <a:off x="6519672" y="2258568"/>
+            <a:ext cx="1828800" cy="292608"/>
+          </a:xfrm>
+          <a:prstGeom prst="rect">
+            <a:avLst>
+              <a:gd name="adj" fmla="val 25000"/>
+            </a:avLst>
+          </a:prstGeom>
+          <a:solidFill>
+            <a:srgbClr val="FCE7F3"/>
+          </a:solidFill>
+          <a:ln w="19050">
+            <a:solidFill>
+              <a:srgbClr val="DB2777"/>
+            </a:solidFill>
+            <a:prstDash val="solid"/>
+          </a:ln>
+          <a:effectLst>
+            <a:outerShdw sx="100000" sy="100000" kx="0" ky="0" algn="bl" rotWithShape="0" blurRad="101600" dist="38100" dir="8100000">
+              <a:srgbClr val="000000">
+                <a:alpha val="12000"/>
+              </a:srgbClr>
+            </a:outerShdw>
+          </a:effectLst>
+        </p:spPr>
+      </p:sp>
+      <p:sp>
+        <p:nvSpPr>
+          <p:cNvPr id="23" name="Text 21"/>
+          <p:cNvSpPr/>
+          <p:nvPr/>
+        </p:nvSpPr>
+        <p:spPr>
+          <a:xfrm>
+            <a:off x="6519672" y="2258568"/>
+            <a:ext cx="1828800" cy="292608"/>
+          </a:xfrm>
+          <a:prstGeom prst="rect">
+            <a:avLst/>
+          </a:prstGeom>
+          <a:noFill/>
+          <a:ln/>
+        </p:spPr>
+        <p:txBody>
+          <a:bodyPr wrap="square" lIns="0" tIns="0" rIns="0" bIns="0" rtlCol="0" anchor="ctr"/>
+          <a:lstStyle/>
+          <a:p>
+            <a:pPr algn="ctr" indent="0" marL="0">
+              <a:buNone/>
+            </a:pPr>
+            <a:r>
+              <a:rPr lang="en-US" sz="1300" b="1" dirty="0">
+                <a:solidFill>
+                  <a:srgbClr val="9D174D"/>
+                </a:solidFill>
+                <a:latin typeface="Trebuchet MS" pitchFamily="34" charset="0"/>
+                <a:ea typeface="Trebuchet MS" pitchFamily="34" charset="-122"/>
+                <a:cs typeface="Trebuchet MS" pitchFamily="34" charset="-120"/>
+              </a:rPr>
+              <a:t>s</a:t>
+            </a:r>
+            <a:endParaRPr lang="en-US" sz="1300" dirty="0"/>
+          </a:p>
+        </p:txBody>
+      </p:sp>
+      <p:sp>
+        <p:nvSpPr>
+          <p:cNvPr id="24" name="Text 22"/>
+          <p:cNvSpPr/>
+          <p:nvPr/>
+        </p:nvSpPr>
+        <p:spPr>
+          <a:xfrm>
+            <a:off x="6519672" y="2569464"/>
+            <a:ext cx="1828800" cy="201168"/>
+          </a:xfrm>
+          <a:prstGeom prst="rect">
+            <a:avLst/>
+          </a:prstGeom>
+          <a:noFill/>
+          <a:ln/>
+        </p:spPr>
+        <p:txBody>
+          <a:bodyPr wrap="square" lIns="0" tIns="0" rIns="0" bIns="0" rtlCol="0" anchor="t"/>
+          <a:lstStyle/>
+          <a:p>
+            <a:pPr algn="ctr" indent="0" marL="0">
+              <a:buNone/>
+            </a:pPr>
+            <a:r>
+              <a:rPr lang="en-US" sz="850" dirty="0">
+                <a:solidFill>
+                  <a:srgbClr val="475569"/>
+                </a:solidFill>
+                <a:latin typeface="Calibri" pitchFamily="34" charset="0"/>
+                <a:ea typeface="Calibri" pitchFamily="34" charset="-122"/>
+                <a:cs typeface="Calibri" pitchFamily="34" charset="-120"/>
+              </a:rPr>
+              <a:t>more than one</a:t>
+            </a:r>
+            <a:endParaRPr lang="en-US" sz="850" dirty="0"/>
+          </a:p>
+        </p:txBody>
+      </p:sp>
+      <p:sp>
+        <p:nvSpPr>
+          <p:cNvPr id="25" name="Shape 23"/>
           <p:cNvSpPr/>
           <p:nvPr/>
         </p:nvSpPr>
@@ -14711,7 +15047,7 @@
       </p:sp>
       <p:sp>
         <p:nvSpPr>
-          <p:cNvPr id="23" name="Text 21"/>
+          <p:cNvPr id="26" name="Text 24"/>
           <p:cNvSpPr/>
           <p:nvPr/>
         </p:nvSpPr>
@@ -14750,7 +15086,7 @@
       </p:sp>
       <p:sp>
         <p:nvSpPr>
-          <p:cNvPr id="24" name="Shape 22"/>
+          <p:cNvPr id="27" name="Shape 25"/>
           <p:cNvSpPr/>
           <p:nvPr/>
         </p:nvSpPr>
@@ -14777,7 +15113,7 @@
       </p:sp>
       <p:sp>
         <p:nvSpPr>
-          <p:cNvPr id="25" name="Shape 23"/>
+          <p:cNvPr id="28" name="Shape 26"/>
           <p:cNvSpPr/>
           <p:nvPr/>
         </p:nvSpPr>
@@ -14804,7 +15140,7 @@
       </p:sp>
       <p:sp>
         <p:nvSpPr>
-          <p:cNvPr id="26" name="Text 24"/>
+          <p:cNvPr id="29" name="Text 27"/>
           <p:cNvSpPr/>
           <p:nvPr/>
         </p:nvSpPr>
@@ -14835,7 +15171,7 @@
                 <a:ea typeface="Trebuchet MS" pitchFamily="34" charset="-122"/>
                 <a:cs typeface="Trebuchet MS" pitchFamily="34" charset="-120"/>
               </a:rPr>
-              <a:t>back</a:t>
+              <a:t>pack</a:t>
             </a:r>
             <a:endParaRPr lang="en-US" sz="1400" dirty="0"/>
           </a:p>
@@ -14843,7 +15179,7 @@
       </p:sp>
       <p:sp>
         <p:nvSpPr>
-          <p:cNvPr id="27" name="Text 25"/>
+          <p:cNvPr id="30" name="Text 28"/>
           <p:cNvSpPr/>
           <p:nvPr/>
         </p:nvSpPr>
@@ -14882,7 +15218,7 @@
       </p:sp>
       <p:sp>
         <p:nvSpPr>
-          <p:cNvPr id="28" name="Shape 26"/>
+          <p:cNvPr id="31" name="Shape 29"/>
           <p:cNvSpPr/>
           <p:nvPr/>
         </p:nvSpPr>
@@ -14909,7 +15245,7 @@
       </p:sp>
       <p:sp>
         <p:nvSpPr>
-          <p:cNvPr id="29" name="Text 27"/>
+          <p:cNvPr id="32" name="Text 30"/>
           <p:cNvSpPr/>
           <p:nvPr/>
         </p:nvSpPr>
@@ -14940,7 +15276,7 @@
                 <a:ea typeface="Trebuchet MS" pitchFamily="34" charset="-122"/>
                 <a:cs typeface="Trebuchet MS" pitchFamily="34" charset="-120"/>
               </a:rPr>
-              <a:t>pack</a:t>
+              <a:t>ets</a:t>
             </a:r>
             <a:endParaRPr lang="en-US" sz="1400" dirty="0"/>
           </a:p>
@@ -14948,7 +15284,7 @@
       </p:sp>
       <p:sp>
         <p:nvSpPr>
-          <p:cNvPr id="30" name="Shape 28"/>
+          <p:cNvPr id="33" name="Shape 31"/>
           <p:cNvSpPr/>
           <p:nvPr/>
         </p:nvSpPr>
@@ -14975,7 +15311,7 @@
       </p:sp>
       <p:sp>
         <p:nvSpPr>
-          <p:cNvPr id="31" name="Text 29"/>
+          <p:cNvPr id="34" name="Text 32"/>
           <p:cNvSpPr/>
           <p:nvPr/>
         </p:nvSpPr>
@@ -15014,7 +15350,7 @@
       </p:sp>
       <p:sp>
         <p:nvSpPr>
-          <p:cNvPr id="32" name="Shape 30"/>
+          <p:cNvPr id="35" name="Shape 33"/>
           <p:cNvSpPr/>
           <p:nvPr/>
         </p:nvSpPr>
@@ -15041,7 +15377,7 @@
       </p:sp>
       <p:sp>
         <p:nvSpPr>
-          <p:cNvPr id="33" name="Shape 31"/>
+          <p:cNvPr id="36" name="Shape 34"/>
           <p:cNvSpPr/>
           <p:nvPr/>
         </p:nvSpPr>
@@ -15068,7 +15404,7 @@
       </p:sp>
       <p:sp>
         <p:nvSpPr>
-          <p:cNvPr id="34" name="Text 32"/>
+          <p:cNvPr id="37" name="Text 35"/>
           <p:cNvSpPr/>
           <p:nvPr/>
         </p:nvSpPr>
@@ -15099,7 +15435,7 @@
                 <a:ea typeface="Trebuchet MS" pitchFamily="34" charset="-122"/>
                 <a:cs typeface="Trebuchet MS" pitchFamily="34" charset="-120"/>
               </a:rPr>
-              <a:t>b</a:t>
+              <a:t>p</a:t>
             </a:r>
             <a:endParaRPr lang="en-US" sz="900" dirty="0"/>
           </a:p>
@@ -15107,7 +15443,7 @@
       </p:sp>
       <p:sp>
         <p:nvSpPr>
-          <p:cNvPr id="35" name="Shape 33"/>
+          <p:cNvPr id="38" name="Shape 36"/>
           <p:cNvSpPr/>
           <p:nvPr/>
         </p:nvSpPr>
@@ -15134,7 +15470,7 @@
       </p:sp>
       <p:sp>
         <p:nvSpPr>
-          <p:cNvPr id="36" name="Text 34"/>
+          <p:cNvPr id="39" name="Text 37"/>
           <p:cNvSpPr/>
           <p:nvPr/>
         </p:nvSpPr>
@@ -15173,7 +15509,7 @@
       </p:sp>
       <p:sp>
         <p:nvSpPr>
-          <p:cNvPr id="37" name="Shape 35"/>
+          <p:cNvPr id="40" name="Shape 38"/>
           <p:cNvSpPr/>
           <p:nvPr/>
         </p:nvSpPr>
@@ -15200,7 +15536,7 @@
       </p:sp>
       <p:sp>
         <p:nvSpPr>
-          <p:cNvPr id="38" name="Text 36"/>
+          <p:cNvPr id="41" name="Text 39"/>
           <p:cNvSpPr/>
           <p:nvPr/>
         </p:nvSpPr>
@@ -15239,7 +15575,7 @@
       </p:sp>
       <p:sp>
         <p:nvSpPr>
-          <p:cNvPr id="39" name="Shape 37"/>
+          <p:cNvPr id="42" name="Shape 40"/>
           <p:cNvSpPr/>
           <p:nvPr/>
         </p:nvSpPr>
@@ -15266,7 +15602,7 @@
       </p:sp>
       <p:sp>
         <p:nvSpPr>
-          <p:cNvPr id="40" name="Text 38"/>
+          <p:cNvPr id="43" name="Text 41"/>
           <p:cNvSpPr/>
           <p:nvPr/>
         </p:nvSpPr>
@@ -15297,7 +15633,7 @@
                 <a:ea typeface="Trebuchet MS" pitchFamily="34" charset="-122"/>
                 <a:cs typeface="Trebuchet MS" pitchFamily="34" charset="-120"/>
               </a:rPr>
-              <a:t>p</a:t>
+              <a:t>e</a:t>
             </a:r>
             <a:endParaRPr lang="en-US" sz="900" dirty="0"/>
           </a:p>
@@ -15305,7 +15641,7 @@
       </p:sp>
       <p:sp>
         <p:nvSpPr>
-          <p:cNvPr id="41" name="Shape 39"/>
+          <p:cNvPr id="44" name="Shape 42"/>
           <p:cNvSpPr/>
           <p:nvPr/>
         </p:nvSpPr>
@@ -15332,7 +15668,7 @@
       </p:sp>
       <p:sp>
         <p:nvSpPr>
-          <p:cNvPr id="42" name="Text 40"/>
+          <p:cNvPr id="45" name="Text 43"/>
           <p:cNvSpPr/>
           <p:nvPr/>
         </p:nvSpPr>
@@ -15363,7 +15699,7 @@
                 <a:ea typeface="Trebuchet MS" pitchFamily="34" charset="-122"/>
                 <a:cs typeface="Trebuchet MS" pitchFamily="34" charset="-120"/>
               </a:rPr>
-              <a:t>a</a:t>
+              <a:t>t</a:t>
             </a:r>
             <a:endParaRPr lang="en-US" sz="900" dirty="0"/>
           </a:p>
@@ -15371,7 +15707,7 @@
       </p:sp>
       <p:sp>
         <p:nvSpPr>
-          <p:cNvPr id="43" name="Shape 41"/>
+          <p:cNvPr id="46" name="Shape 44"/>
           <p:cNvSpPr/>
           <p:nvPr/>
         </p:nvSpPr>
@@ -15398,7 +15734,7 @@
       </p:sp>
       <p:sp>
         <p:nvSpPr>
-          <p:cNvPr id="44" name="Text 42"/>
+          <p:cNvPr id="47" name="Text 45"/>
           <p:cNvSpPr/>
           <p:nvPr/>
         </p:nvSpPr>
@@ -15429,7 +15765,7 @@
                 <a:ea typeface="Trebuchet MS" pitchFamily="34" charset="-122"/>
                 <a:cs typeface="Trebuchet MS" pitchFamily="34" charset="-120"/>
               </a:rPr>
-              <a:t>ck</a:t>
+              <a:t>s</a:t>
             </a:r>
             <a:endParaRPr lang="en-US" sz="900" dirty="0"/>
           </a:p>
@@ -16003,7 +16339,7 @@
                 <a:ea typeface="Calibri" pitchFamily="34" charset="-122"/>
                 <a:cs typeface="Calibri" pitchFamily="34" charset="-120"/>
               </a:rPr>
-              <a:t>Word Labs  •  wordlabs.app  •  Root: 'pack' = bundle, wrap, or group together</a:t>
+              <a:t>Word Labs  •  wordlabs.app  •  Root: 'pack' = bundle, group, fill tightly</a:t>
             </a:r>
             <a:endParaRPr lang="en-US" sz="800" dirty="0"/>
           </a:p>
@@ -16337,7 +16673,7 @@
                 <a:ea typeface="Trebuchet MS" pitchFamily="34" charset="-122"/>
                 <a:cs typeface="Trebuchet MS" pitchFamily="34" charset="-120"/>
               </a:rPr>
-              <a:t>1</a:t>
+              <a:t>2</a:t>
             </a:r>
             <a:pPr algn="ctr" indent="0" marL="0">
               <a:buNone/>
@@ -16351,7 +16687,7 @@
                 <a:ea typeface="Trebuchet MS" pitchFamily="34" charset="-122"/>
                 <a:cs typeface="Trebuchet MS" pitchFamily="34" charset="-120"/>
               </a:rPr>
-              <a:t>  punctuation mark</a:t>
+              <a:t>  punctuation marks</a:t>
             </a:r>
             <a:endParaRPr lang="en-US" sz="2800" dirty="0"/>
           </a:p>
@@ -16643,7 +16979,7 @@
                 <a:ea typeface="Calibri" pitchFamily="34" charset="-122"/>
                 <a:cs typeface="Calibri" pitchFamily="34" charset="-120"/>
               </a:rPr>
-              <a:t>Word Labs  •  wordlabs.app  •  Root: 'pack' = bundle, wrap, or group together</a:t>
+              <a:t>Word Labs  •  wordlabs.app  •  Root: 'pack' = bundle, group, fill tightly</a:t>
             </a:r>
             <a:endParaRPr lang="en-US" sz="800" dirty="0"/>
           </a:p>
@@ -16786,7 +17122,7 @@
                 <a:ea typeface="Calibri" pitchFamily="34" charset="-122"/>
                 <a:cs typeface="Calibri" pitchFamily="34" charset="-120"/>
               </a:rPr>
-              <a:t> carefully placed each </a:t>
+              <a:t> worked quickly to fill each </a:t>
             </a:r>
             <a:pPr algn="l" indent="0" marL="0">
               <a:buNone/>
@@ -16803,7 +17139,7 @@
                 <a:ea typeface="Calibri" pitchFamily="34" charset="-122"/>
                 <a:cs typeface="Calibri" pitchFamily="34" charset="-120"/>
               </a:rPr>
-              <a:t>packet</a:t>
+              <a:t>package</a:t>
             </a:r>
             <a:pPr algn="l" indent="0" marL="0">
               <a:buNone/>
@@ -16817,7 +17153,7 @@
                 <a:ea typeface="Calibri" pitchFamily="34" charset="-122"/>
                 <a:cs typeface="Calibri" pitchFamily="34" charset="-120"/>
               </a:rPr>
-              <a:t> into the </a:t>
+              <a:t>, but forgot to repack the </a:t>
             </a:r>
             <a:pPr algn="l" indent="0" marL="0">
               <a:buNone/>
@@ -16834,7 +17170,7 @@
                 <a:ea typeface="Calibri" pitchFamily="34" charset="-122"/>
                 <a:cs typeface="Calibri" pitchFamily="34" charset="-120"/>
               </a:rPr>
-              <a:t>package</a:t>
+              <a:t>backpack</a:t>
             </a:r>
             <a:pPr algn="l" indent="0" marL="0">
               <a:buNone/>
@@ -16848,7 +17184,7 @@
                 <a:ea typeface="Calibri" pitchFamily="34" charset="-122"/>
                 <a:cs typeface="Calibri" pitchFamily="34" charset="-120"/>
               </a:rPr>
-              <a:t>, making sure nothing would break during delivery.</a:t>
+              <a:t>!</a:t>
             </a:r>
             <a:endParaRPr lang="en-US" sz="1800" dirty="0"/>
           </a:p>
@@ -17131,7 +17467,7 @@
                 <a:ea typeface="Trebuchet MS" pitchFamily="34" charset="-122"/>
                 <a:cs typeface="Trebuchet MS" pitchFamily="34" charset="-120"/>
               </a:rPr>
-              <a:t>packet</a:t>
+              <a:t>package</a:t>
             </a:r>
             <a:endParaRPr lang="en-US" sz="1400" dirty="0"/>
           </a:p>
@@ -17259,7 +17595,7 @@
                 <a:ea typeface="Trebuchet MS" pitchFamily="34" charset="-122"/>
                 <a:cs typeface="Trebuchet MS" pitchFamily="34" charset="-120"/>
               </a:rPr>
-              <a:t>package</a:t>
+              <a:t>backpack</a:t>
             </a:r>
             <a:endParaRPr lang="en-US" sz="1400" dirty="0"/>
           </a:p>
@@ -17590,7 +17926,7 @@
                 <a:ea typeface="Calibri" pitchFamily="34" charset="-122"/>
                 <a:cs typeface="Calibri" pitchFamily="34" charset="-120"/>
               </a:rPr>
-              <a:t>Word Labs  •  wordlabs.app  •  Root: 'pack' = bundle, wrap, or group together</a:t>
+              <a:t>Word Labs  •  wordlabs.app  •  Root: 'pack' = bundle, group, fill tightly</a:t>
             </a:r>
             <a:endParaRPr lang="en-US" sz="800" dirty="0"/>
           </a:p>
@@ -18417,7 +18753,7 @@
                 <a:ea typeface="Calibri" pitchFamily="34" charset="-122"/>
                 <a:cs typeface="Calibri" pitchFamily="34" charset="-120"/>
               </a:rPr>
-              <a:t>Word Labs  •  wordlabs.app  •  Root: 'pack' = bundle, wrap, or group together</a:t>
+              <a:t>Word Labs  •  wordlabs.app  •  Root: 'pack' = bundle, group, fill tightly</a:t>
             </a:r>
             <a:endParaRPr lang="en-US" sz="800" dirty="0"/>
           </a:p>
@@ -18734,7 +19070,7 @@
                 <a:ea typeface="Calibri" pitchFamily="34" charset="-122"/>
                 <a:cs typeface="Calibri" pitchFamily="34" charset="-120"/>
               </a:rPr>
-              <a:t>bundle or group together</a:t>
+              <a:t>bundle, fill tightly</a:t>
             </a:r>
             <a:endParaRPr lang="en-US" sz="850" dirty="0"/>
           </a:p>
@@ -18846,7 +19182,7 @@
                 <a:ea typeface="Calibri" pitchFamily="34" charset="-122"/>
                 <a:cs typeface="Calibri" pitchFamily="34" charset="-120"/>
               </a:rPr>
-              <a:t>a person or thing that does</a:t>
+              <a:t>a person or thing that does something</a:t>
             </a:r>
             <a:endParaRPr lang="en-US" sz="850" dirty="0"/>
           </a:p>
@@ -19402,7 +19738,7 @@
                 <a:ea typeface="Calibri" pitchFamily="34" charset="-122"/>
                 <a:cs typeface="Calibri" pitchFamily="34" charset="-120"/>
               </a:rPr>
-              <a:t>Word Labs  •  wordlabs.app  •  Root: 'pack' = bundle, wrap, or group together</a:t>
+              <a:t>Word Labs  •  wordlabs.app  •  Root: 'pack' = bundle, group, fill tightly</a:t>
             </a:r>
             <a:endParaRPr lang="en-US" sz="800" dirty="0"/>
           </a:p>
@@ -19719,7 +20055,7 @@
                 <a:ea typeface="Calibri" pitchFamily="34" charset="-122"/>
                 <a:cs typeface="Calibri" pitchFamily="34" charset="-120"/>
               </a:rPr>
-              <a:t>bundle or group together</a:t>
+              <a:t>bundle, fill tightly</a:t>
             </a:r>
             <a:endParaRPr lang="en-US" sz="850" dirty="0"/>
           </a:p>
@@ -19831,7 +20167,7 @@
                 <a:ea typeface="Calibri" pitchFamily="34" charset="-122"/>
                 <a:cs typeface="Calibri" pitchFamily="34" charset="-120"/>
               </a:rPr>
-              <a:t>a person or thing that does</a:t>
+              <a:t>a person or thing that does something</a:t>
             </a:r>
             <a:endParaRPr lang="en-US" sz="850" dirty="0"/>
           </a:p>
@@ -20519,7 +20855,7 @@
                 <a:ea typeface="Calibri" pitchFamily="34" charset="-122"/>
                 <a:cs typeface="Calibri" pitchFamily="34" charset="-120"/>
               </a:rPr>
-              <a:t>Word Labs  •  wordlabs.app  •  Root: 'pack' = bundle, wrap, or group together</a:t>
+              <a:t>Word Labs  •  wordlabs.app  •  Root: 'pack' = bundle, group, fill tightly</a:t>
             </a:r>
             <a:endParaRPr lang="en-US" sz="800" dirty="0"/>
           </a:p>
@@ -20836,7 +21172,7 @@
                 <a:ea typeface="Calibri" pitchFamily="34" charset="-122"/>
                 <a:cs typeface="Calibri" pitchFamily="34" charset="-120"/>
               </a:rPr>
-              <a:t>bundle or group together</a:t>
+              <a:t>bundle, fill tightly</a:t>
             </a:r>
             <a:endParaRPr lang="en-US" sz="850" dirty="0"/>
           </a:p>
@@ -20948,7 +21284,7 @@
                 <a:ea typeface="Calibri" pitchFamily="34" charset="-122"/>
                 <a:cs typeface="Calibri" pitchFamily="34" charset="-120"/>
               </a:rPr>
-              <a:t>a person or thing that does</a:t>
+              <a:t>a person or thing that does something</a:t>
             </a:r>
             <a:endParaRPr lang="en-US" sz="850" dirty="0"/>
           </a:p>
@@ -21861,7 +22197,7 @@
                 <a:ea typeface="Calibri" pitchFamily="34" charset="-122"/>
                 <a:cs typeface="Calibri" pitchFamily="34" charset="-120"/>
               </a:rPr>
-              <a:t>Word Labs  •  wordlabs.app  •  Root: 'pack' = bundle, wrap, or group together</a:t>
+              <a:t>Word Labs  •  wordlabs.app  •  Root: 'pack' = bundle, group, fill tightly</a:t>
             </a:r>
             <a:endParaRPr lang="en-US" sz="800" dirty="0"/>
           </a:p>
@@ -22000,7 +22336,7 @@
                 <a:ea typeface="Trebuchet MS" pitchFamily="34" charset="-122"/>
                 <a:cs typeface="Trebuchet MS" pitchFamily="34" charset="-120"/>
               </a:rPr>
-              <a:t>packet</a:t>
+              <a:t>package</a:t>
             </a:r>
             <a:endParaRPr lang="en-US" sz="2800" dirty="0"/>
           </a:p>
@@ -22688,7 +23024,7 @@
                 <a:ea typeface="Calibri" pitchFamily="34" charset="-122"/>
                 <a:cs typeface="Calibri" pitchFamily="34" charset="-120"/>
               </a:rPr>
-              <a:t>Word Labs  •  wordlabs.app  •  Root: 'pack' = bundle, wrap, or group together</a:t>
+              <a:t>Word Labs  •  wordlabs.app  •  Root: 'pack' = bundle, group, fill tightly</a:t>
             </a:r>
             <a:endParaRPr lang="en-US" sz="800" dirty="0"/>
           </a:p>
@@ -22827,7 +23163,7 @@
                 <a:ea typeface="Trebuchet MS" pitchFamily="34" charset="-122"/>
                 <a:cs typeface="Trebuchet MS" pitchFamily="34" charset="-120"/>
               </a:rPr>
-              <a:t>packet</a:t>
+              <a:t>package</a:t>
             </a:r>
             <a:endParaRPr lang="en-US" sz="2800" dirty="0"/>
           </a:p>
@@ -23005,7 +23341,7 @@
                 <a:ea typeface="Calibri" pitchFamily="34" charset="-122"/>
                 <a:cs typeface="Calibri" pitchFamily="34" charset="-120"/>
               </a:rPr>
-              <a:t>bundle or group together</a:t>
+              <a:t>bundle, fill tightly</a:t>
             </a:r>
             <a:endParaRPr lang="en-US" sz="850" dirty="0"/>
           </a:p>
@@ -23028,11 +23364,11 @@
             </a:avLst>
           </a:prstGeom>
           <a:solidFill>
-            <a:srgbClr val="DDD6FE"/>
+            <a:srgbClr val="FCE7F3"/>
           </a:solidFill>
           <a:ln w="19050">
             <a:solidFill>
-              <a:srgbClr val="7C3AED"/>
+              <a:srgbClr val="DB2777"/>
             </a:solidFill>
             <a:prstDash val="solid"/>
           </a:ln>
@@ -23072,13 +23408,13 @@
             <a:r>
               <a:rPr lang="en-US" sz="1300" b="1" dirty="0">
                 <a:solidFill>
-                  <a:srgbClr val="4C1D95"/>
+                  <a:srgbClr val="9D174D"/>
                 </a:solidFill>
                 <a:latin typeface="Trebuchet MS" pitchFamily="34" charset="0"/>
                 <a:ea typeface="Trebuchet MS" pitchFamily="34" charset="-122"/>
                 <a:cs typeface="Trebuchet MS" pitchFamily="34" charset="-120"/>
               </a:rPr>
-              <a:t>et</a:t>
+              <a:t>age</a:t>
             </a:r>
             <a:endParaRPr lang="en-US" sz="1300" dirty="0"/>
           </a:p>
@@ -23117,7 +23453,7 @@
                 <a:ea typeface="Calibri" pitchFamily="34" charset="-122"/>
                 <a:cs typeface="Calibri" pitchFamily="34" charset="-120"/>
               </a:rPr>
-              <a:t>small</a:t>
+              <a:t>collection or result of</a:t>
             </a:r>
             <a:endParaRPr lang="en-US" sz="850" dirty="0"/>
           </a:p>
@@ -23673,7 +24009,7 @@
                 <a:ea typeface="Calibri" pitchFamily="34" charset="-122"/>
                 <a:cs typeface="Calibri" pitchFamily="34" charset="-120"/>
               </a:rPr>
-              <a:t>Word Labs  •  wordlabs.app  •  Root: 'pack' = bundle, wrap, or group together</a:t>
+              <a:t>Word Labs  •  wordlabs.app  •  Root: 'pack' = bundle, group, fill tightly</a:t>
             </a:r>
             <a:endParaRPr lang="en-US" sz="800" dirty="0"/>
           </a:p>
@@ -23746,7 +24082,7 @@
                 <a:ea typeface="Trebuchet MS" pitchFamily="34" charset="-122"/>
                 <a:cs typeface="Trebuchet MS" pitchFamily="34" charset="-120"/>
               </a:rPr>
-              <a:t>We are learning that the root 'pack' means 'bundle, wrap, or group together'.</a:t>
+              <a:t>We are learning that the root 'pack' means 'bundle, group, fill tightly'.</a:t>
             </a:r>
             <a:endParaRPr lang="en-US" sz="2000" dirty="0"/>
           </a:p>
@@ -24392,7 +24728,7 @@
                 <a:ea typeface="Calibri" pitchFamily="34" charset="-122"/>
                 <a:cs typeface="Calibri" pitchFamily="34" charset="-120"/>
               </a:rPr>
-              <a:t>Word Labs  •  wordlabs.app  •  Root: 'pack' = bundle, wrap, or group together</a:t>
+              <a:t>Word Labs  •  wordlabs.app  •  Root: 'pack' = bundle, group, fill tightly</a:t>
             </a:r>
             <a:endParaRPr lang="en-US" sz="800" dirty="0"/>
           </a:p>
@@ -24531,7 +24867,7 @@
                 <a:ea typeface="Trebuchet MS" pitchFamily="34" charset="-122"/>
                 <a:cs typeface="Trebuchet MS" pitchFamily="34" charset="-120"/>
               </a:rPr>
-              <a:t>packet</a:t>
+              <a:t>package</a:t>
             </a:r>
             <a:endParaRPr lang="en-US" sz="2800" dirty="0"/>
           </a:p>
@@ -24709,7 +25045,7 @@
                 <a:ea typeface="Calibri" pitchFamily="34" charset="-122"/>
                 <a:cs typeface="Calibri" pitchFamily="34" charset="-120"/>
               </a:rPr>
-              <a:t>bundle or group together</a:t>
+              <a:t>bundle, fill tightly</a:t>
             </a:r>
             <a:endParaRPr lang="en-US" sz="850" dirty="0"/>
           </a:p>
@@ -24732,11 +25068,11 @@
             </a:avLst>
           </a:prstGeom>
           <a:solidFill>
-            <a:srgbClr val="DDD6FE"/>
+            <a:srgbClr val="FCE7F3"/>
           </a:solidFill>
           <a:ln w="19050">
             <a:solidFill>
-              <a:srgbClr val="7C3AED"/>
+              <a:srgbClr val="DB2777"/>
             </a:solidFill>
             <a:prstDash val="solid"/>
           </a:ln>
@@ -24776,13 +25112,13 @@
             <a:r>
               <a:rPr lang="en-US" sz="1300" b="1" dirty="0">
                 <a:solidFill>
-                  <a:srgbClr val="4C1D95"/>
+                  <a:srgbClr val="9D174D"/>
                 </a:solidFill>
                 <a:latin typeface="Trebuchet MS" pitchFamily="34" charset="0"/>
                 <a:ea typeface="Trebuchet MS" pitchFamily="34" charset="-122"/>
                 <a:cs typeface="Trebuchet MS" pitchFamily="34" charset="-120"/>
               </a:rPr>
-              <a:t>et</a:t>
+              <a:t>age</a:t>
             </a:r>
             <a:endParaRPr lang="en-US" sz="1300" dirty="0"/>
           </a:p>
@@ -24821,7 +25157,7 @@
                 <a:ea typeface="Calibri" pitchFamily="34" charset="-122"/>
                 <a:cs typeface="Calibri" pitchFamily="34" charset="-120"/>
               </a:rPr>
-              <a:t>small</a:t>
+              <a:t>collection or result of</a:t>
             </a:r>
             <a:endParaRPr lang="en-US" sz="850" dirty="0"/>
           </a:p>
@@ -25085,7 +25421,7 @@
                 <a:ea typeface="Trebuchet MS" pitchFamily="34" charset="-122"/>
                 <a:cs typeface="Trebuchet MS" pitchFamily="34" charset="-120"/>
               </a:rPr>
-              <a:t>et</a:t>
+              <a:t>age</a:t>
             </a:r>
             <a:endParaRPr lang="en-US" sz="1400" dirty="0"/>
           </a:p>
@@ -25509,7 +25845,7 @@
                 <a:ea typeface="Calibri" pitchFamily="34" charset="-122"/>
                 <a:cs typeface="Calibri" pitchFamily="34" charset="-120"/>
               </a:rPr>
-              <a:t>Word Labs  •  wordlabs.app  •  Root: 'pack' = bundle, wrap, or group together</a:t>
+              <a:t>Word Labs  •  wordlabs.app  •  Root: 'pack' = bundle, group, fill tightly</a:t>
             </a:r>
             <a:endParaRPr lang="en-US" sz="800" dirty="0"/>
           </a:p>
@@ -25648,7 +25984,7 @@
                 <a:ea typeface="Trebuchet MS" pitchFamily="34" charset="-122"/>
                 <a:cs typeface="Trebuchet MS" pitchFamily="34" charset="-120"/>
               </a:rPr>
-              <a:t>packet</a:t>
+              <a:t>package</a:t>
             </a:r>
             <a:endParaRPr lang="en-US" sz="2800" dirty="0"/>
           </a:p>
@@ -25826,7 +26162,7 @@
                 <a:ea typeface="Calibri" pitchFamily="34" charset="-122"/>
                 <a:cs typeface="Calibri" pitchFamily="34" charset="-120"/>
               </a:rPr>
-              <a:t>bundle or group together</a:t>
+              <a:t>bundle, fill tightly</a:t>
             </a:r>
             <a:endParaRPr lang="en-US" sz="850" dirty="0"/>
           </a:p>
@@ -25849,11 +26185,11 @@
             </a:avLst>
           </a:prstGeom>
           <a:solidFill>
-            <a:srgbClr val="DDD6FE"/>
+            <a:srgbClr val="FCE7F3"/>
           </a:solidFill>
           <a:ln w="19050">
             <a:solidFill>
-              <a:srgbClr val="7C3AED"/>
+              <a:srgbClr val="DB2777"/>
             </a:solidFill>
             <a:prstDash val="solid"/>
           </a:ln>
@@ -25893,13 +26229,13 @@
             <a:r>
               <a:rPr lang="en-US" sz="1300" b="1" dirty="0">
                 <a:solidFill>
-                  <a:srgbClr val="4C1D95"/>
+                  <a:srgbClr val="9D174D"/>
                 </a:solidFill>
                 <a:latin typeface="Trebuchet MS" pitchFamily="34" charset="0"/>
                 <a:ea typeface="Trebuchet MS" pitchFamily="34" charset="-122"/>
                 <a:cs typeface="Trebuchet MS" pitchFamily="34" charset="-120"/>
               </a:rPr>
-              <a:t>et</a:t>
+              <a:t>age</a:t>
             </a:r>
             <a:endParaRPr lang="en-US" sz="1300" dirty="0"/>
           </a:p>
@@ -25938,7 +26274,7 @@
                 <a:ea typeface="Calibri" pitchFamily="34" charset="-122"/>
                 <a:cs typeface="Calibri" pitchFamily="34" charset="-120"/>
               </a:rPr>
-              <a:t>small</a:t>
+              <a:t>collection or result of</a:t>
             </a:r>
             <a:endParaRPr lang="en-US" sz="850" dirty="0"/>
           </a:p>
@@ -26202,7 +26538,7 @@
                 <a:ea typeface="Trebuchet MS" pitchFamily="34" charset="-122"/>
                 <a:cs typeface="Trebuchet MS" pitchFamily="34" charset="-120"/>
               </a:rPr>
-              <a:t>et</a:t>
+              <a:t>age</a:t>
             </a:r>
             <a:endParaRPr lang="en-US" sz="1400" dirty="0"/>
           </a:p>
@@ -26283,11 +26619,11 @@
         <p:spPr>
           <a:xfrm>
             <a:off x="1874520" y="4096512"/>
-            <a:ext cx="6903720" cy="658368"/>
+            <a:ext cx="6903720" cy="804672"/>
           </a:xfrm>
           <a:prstGeom prst="rect">
             <a:avLst>
-              <a:gd name="adj" fmla="val 8333"/>
+              <a:gd name="adj" fmla="val 6818"/>
             </a:avLst>
           </a:prstGeom>
           <a:solidFill>
@@ -26310,11 +26646,11 @@
         <p:spPr>
           <a:xfrm>
             <a:off x="2427732" y="4169664"/>
-            <a:ext cx="685800" cy="475488"/>
+            <a:ext cx="685800" cy="384048"/>
           </a:xfrm>
           <a:prstGeom prst="rect">
             <a:avLst>
-              <a:gd name="adj" fmla="val 7692"/>
+              <a:gd name="adj" fmla="val 9524"/>
             </a:avLst>
           </a:prstGeom>
           <a:solidFill>
@@ -26337,7 +26673,7 @@
         <p:spPr>
           <a:xfrm>
             <a:off x="2427732" y="4169664"/>
-            <a:ext cx="685800" cy="475488"/>
+            <a:ext cx="685800" cy="384048"/>
           </a:xfrm>
           <a:prstGeom prst="rect">
             <a:avLst/>
@@ -26376,11 +26712,11 @@
         <p:spPr>
           <a:xfrm>
             <a:off x="3639312" y="4169664"/>
-            <a:ext cx="685800" cy="475488"/>
+            <a:ext cx="685800" cy="384048"/>
           </a:xfrm>
           <a:prstGeom prst="rect">
             <a:avLst>
-              <a:gd name="adj" fmla="val 7692"/>
+              <a:gd name="adj" fmla="val 9524"/>
             </a:avLst>
           </a:prstGeom>
           <a:solidFill>
@@ -26403,7 +26739,7 @@
         <p:spPr>
           <a:xfrm>
             <a:off x="3639312" y="4169664"/>
-            <a:ext cx="685800" cy="475488"/>
+            <a:ext cx="685800" cy="384048"/>
           </a:xfrm>
           <a:prstGeom prst="rect">
             <a:avLst/>
@@ -26442,11 +26778,11 @@
         <p:spPr>
           <a:xfrm>
             <a:off x="4850892" y="4169664"/>
-            <a:ext cx="685800" cy="475488"/>
+            <a:ext cx="685800" cy="384048"/>
           </a:xfrm>
           <a:prstGeom prst="rect">
             <a:avLst>
-              <a:gd name="adj" fmla="val 7692"/>
+              <a:gd name="adj" fmla="val 9524"/>
             </a:avLst>
           </a:prstGeom>
           <a:solidFill>
@@ -26469,7 +26805,7 @@
         <p:spPr>
           <a:xfrm>
             <a:off x="4850892" y="4169664"/>
-            <a:ext cx="685800" cy="475488"/>
+            <a:ext cx="685800" cy="384048"/>
           </a:xfrm>
           <a:prstGeom prst="rect">
             <a:avLst/>
@@ -26508,11 +26844,11 @@
         <p:spPr>
           <a:xfrm>
             <a:off x="6062472" y="4169664"/>
-            <a:ext cx="685800" cy="475488"/>
+            <a:ext cx="685800" cy="384048"/>
           </a:xfrm>
           <a:prstGeom prst="rect">
             <a:avLst>
-              <a:gd name="adj" fmla="val 7692"/>
+              <a:gd name="adj" fmla="val 9524"/>
             </a:avLst>
           </a:prstGeom>
           <a:solidFill>
@@ -26535,7 +26871,7 @@
         <p:spPr>
           <a:xfrm>
             <a:off x="6062472" y="4169664"/>
-            <a:ext cx="685800" cy="475488"/>
+            <a:ext cx="685800" cy="384048"/>
           </a:xfrm>
           <a:prstGeom prst="rect">
             <a:avLst/>
@@ -26559,7 +26895,7 @@
                 <a:ea typeface="Trebuchet MS" pitchFamily="34" charset="-122"/>
                 <a:cs typeface="Trebuchet MS" pitchFamily="34" charset="-120"/>
               </a:rPr>
-              <a:t>e</a:t>
+              <a:t>a</a:t>
             </a:r>
             <a:endParaRPr lang="en-US" sz="900" dirty="0"/>
           </a:p>
@@ -26574,11 +26910,11 @@
         <p:spPr>
           <a:xfrm>
             <a:off x="7274052" y="4169664"/>
-            <a:ext cx="685800" cy="475488"/>
+            <a:ext cx="685800" cy="384048"/>
           </a:xfrm>
           <a:prstGeom prst="rect">
             <a:avLst>
-              <a:gd name="adj" fmla="val 7692"/>
+              <a:gd name="adj" fmla="val 9524"/>
             </a:avLst>
           </a:prstGeom>
           <a:solidFill>
@@ -26601,7 +26937,7 @@
         <p:spPr>
           <a:xfrm>
             <a:off x="7274052" y="4169664"/>
-            <a:ext cx="685800" cy="475488"/>
+            <a:ext cx="685800" cy="384048"/>
           </a:xfrm>
           <a:prstGeom prst="rect">
             <a:avLst/>
@@ -26625,9 +26961,48 @@
                 <a:ea typeface="Trebuchet MS" pitchFamily="34" charset="-122"/>
                 <a:cs typeface="Trebuchet MS" pitchFamily="34" charset="-120"/>
               </a:rPr>
-              <a:t>t</a:t>
+              <a:t>ge</a:t>
             </a:r>
             <a:endParaRPr lang="en-US" sz="900" dirty="0"/>
+          </a:p>
+        </p:txBody>
+      </p:sp>
+      <p:sp>
+        <p:nvSpPr>
+          <p:cNvPr id="43" name="Text 41"/>
+          <p:cNvSpPr/>
+          <p:nvPr/>
+        </p:nvSpPr>
+        <p:spPr>
+          <a:xfrm>
+            <a:off x="7274052" y="4572000"/>
+            <a:ext cx="685800" cy="219456"/>
+          </a:xfrm>
+          <a:prstGeom prst="rect">
+            <a:avLst/>
+          </a:prstGeom>
+          <a:noFill/>
+          <a:ln/>
+        </p:spPr>
+        <p:txBody>
+          <a:bodyPr wrap="square" lIns="0" tIns="0" rIns="0" bIns="0" rtlCol="0" anchor="t"/>
+          <a:lstStyle/>
+          <a:p>
+            <a:pPr algn="ctr" indent="0" marL="0">
+              <a:buNone/>
+            </a:pPr>
+            <a:r>
+              <a:rPr lang="en-US" sz="750" i="1" dirty="0">
+                <a:solidFill>
+                  <a:srgbClr val="94A3B8"/>
+                </a:solidFill>
+                <a:latin typeface="Calibri" pitchFamily="34" charset="0"/>
+                <a:ea typeface="Calibri" pitchFamily="34" charset="-122"/>
+                <a:cs typeface="Calibri" pitchFamily="34" charset="-120"/>
+              </a:rPr>
+              <a:t>/j/</a:t>
+            </a:r>
+            <a:endParaRPr lang="en-US" sz="750" dirty="0"/>
           </a:p>
         </p:txBody>
       </p:sp>
@@ -26917,7 +27292,7 @@
                 <a:ea typeface="Calibri" pitchFamily="34" charset="-122"/>
                 <a:cs typeface="Calibri" pitchFamily="34" charset="-120"/>
               </a:rPr>
-              <a:t>Word Labs  •  wordlabs.app  •  Root: 'pack' = bundle, wrap, or group together</a:t>
+              <a:t>Word Labs  •  wordlabs.app  •  Root: 'pack' = bundle, group, fill tightly</a:t>
             </a:r>
             <a:endParaRPr lang="en-US" sz="800" dirty="0"/>
           </a:p>
@@ -27056,7 +27431,7 @@
                 <a:ea typeface="Trebuchet MS" pitchFamily="34" charset="-122"/>
                 <a:cs typeface="Trebuchet MS" pitchFamily="34" charset="-120"/>
               </a:rPr>
-              <a:t>package</a:t>
+              <a:t>backpack</a:t>
             </a:r>
             <a:endParaRPr lang="en-US" sz="2800" dirty="0"/>
           </a:p>
@@ -27744,7 +28119,7 @@
                 <a:ea typeface="Calibri" pitchFamily="34" charset="-122"/>
                 <a:cs typeface="Calibri" pitchFamily="34" charset="-120"/>
               </a:rPr>
-              <a:t>Word Labs  •  wordlabs.app  •  Root: 'pack' = bundle, wrap, or group together</a:t>
+              <a:t>Word Labs  •  wordlabs.app  •  Root: 'pack' = bundle, group, fill tightly</a:t>
             </a:r>
             <a:endParaRPr lang="en-US" sz="800" dirty="0"/>
           </a:p>
@@ -27883,7 +28258,7 @@
                 <a:ea typeface="Trebuchet MS" pitchFamily="34" charset="-122"/>
                 <a:cs typeface="Trebuchet MS" pitchFamily="34" charset="-120"/>
               </a:rPr>
-              <a:t>package</a:t>
+              <a:t>backpack</a:t>
             </a:r>
             <a:endParaRPr lang="en-US" sz="2800" dirty="0"/>
           </a:p>
@@ -27972,11 +28347,11 @@
             </a:avLst>
           </a:prstGeom>
           <a:solidFill>
-            <a:srgbClr val="CCFBF1"/>
+            <a:srgbClr val="DDD6FE"/>
           </a:solidFill>
           <a:ln w="19050">
             <a:solidFill>
-              <a:srgbClr val="0D9488"/>
+              <a:srgbClr val="7C3AED"/>
             </a:solidFill>
             <a:prstDash val="solid"/>
           </a:ln>
@@ -28016,13 +28391,13 @@
             <a:r>
               <a:rPr lang="en-US" sz="1300" b="1" dirty="0">
                 <a:solidFill>
-                  <a:srgbClr val="0F766E"/>
+                  <a:srgbClr val="4C1D95"/>
                 </a:solidFill>
                 <a:latin typeface="Trebuchet MS" pitchFamily="34" charset="0"/>
                 <a:ea typeface="Trebuchet MS" pitchFamily="34" charset="-122"/>
                 <a:cs typeface="Trebuchet MS" pitchFamily="34" charset="-120"/>
               </a:rPr>
-              <a:t>pack</a:t>
+              <a:t>back</a:t>
             </a:r>
             <a:endParaRPr lang="en-US" sz="1300" dirty="0"/>
           </a:p>
@@ -28061,7 +28436,7 @@
                 <a:ea typeface="Calibri" pitchFamily="34" charset="-122"/>
                 <a:cs typeface="Calibri" pitchFamily="34" charset="-120"/>
               </a:rPr>
-              <a:t>bundle or group together</a:t>
+              <a:t>behind, on the back</a:t>
             </a:r>
             <a:endParaRPr lang="en-US" sz="850" dirty="0"/>
           </a:p>
@@ -28084,11 +28459,11 @@
             </a:avLst>
           </a:prstGeom>
           <a:solidFill>
-            <a:srgbClr val="FCE7F3"/>
+            <a:srgbClr val="CCFBF1"/>
           </a:solidFill>
           <a:ln w="19050">
             <a:solidFill>
-              <a:srgbClr val="DB2777"/>
+              <a:srgbClr val="0D9488"/>
             </a:solidFill>
             <a:prstDash val="solid"/>
           </a:ln>
@@ -28128,13 +28503,13 @@
             <a:r>
               <a:rPr lang="en-US" sz="1300" b="1" dirty="0">
                 <a:solidFill>
-                  <a:srgbClr val="9D174D"/>
+                  <a:srgbClr val="0F766E"/>
                 </a:solidFill>
                 <a:latin typeface="Trebuchet MS" pitchFamily="34" charset="0"/>
                 <a:ea typeface="Trebuchet MS" pitchFamily="34" charset="-122"/>
                 <a:cs typeface="Trebuchet MS" pitchFamily="34" charset="-120"/>
               </a:rPr>
-              <a:t>age</a:t>
+              <a:t>pack</a:t>
             </a:r>
             <a:endParaRPr lang="en-US" sz="1300" dirty="0"/>
           </a:p>
@@ -28173,7 +28548,7 @@
                 <a:ea typeface="Calibri" pitchFamily="34" charset="-122"/>
                 <a:cs typeface="Calibri" pitchFamily="34" charset="-120"/>
               </a:rPr>
-              <a:t>result or collection of</a:t>
+              <a:t>bundle, fill tightly</a:t>
             </a:r>
             <a:endParaRPr lang="en-US" sz="850" dirty="0"/>
           </a:p>
@@ -28729,7 +29104,7 @@
                 <a:ea typeface="Calibri" pitchFamily="34" charset="-122"/>
                 <a:cs typeface="Calibri" pitchFamily="34" charset="-120"/>
               </a:rPr>
-              <a:t>Word Labs  •  wordlabs.app  •  Root: 'pack' = bundle, wrap, or group together</a:t>
+              <a:t>Word Labs  •  wordlabs.app  •  Root: 'pack' = bundle, group, fill tightly</a:t>
             </a:r>
             <a:endParaRPr lang="en-US" sz="800" dirty="0"/>
           </a:p>
@@ -28868,7 +29243,7 @@
                 <a:ea typeface="Trebuchet MS" pitchFamily="34" charset="-122"/>
                 <a:cs typeface="Trebuchet MS" pitchFamily="34" charset="-120"/>
               </a:rPr>
-              <a:t>package</a:t>
+              <a:t>backpack</a:t>
             </a:r>
             <a:endParaRPr lang="en-US" sz="2800" dirty="0"/>
           </a:p>
@@ -28957,11 +29332,11 @@
             </a:avLst>
           </a:prstGeom>
           <a:solidFill>
-            <a:srgbClr val="CCFBF1"/>
+            <a:srgbClr val="DDD6FE"/>
           </a:solidFill>
           <a:ln w="19050">
             <a:solidFill>
-              <a:srgbClr val="0D9488"/>
+              <a:srgbClr val="7C3AED"/>
             </a:solidFill>
             <a:prstDash val="solid"/>
           </a:ln>
@@ -29001,13 +29376,13 @@
             <a:r>
               <a:rPr lang="en-US" sz="1300" b="1" dirty="0">
                 <a:solidFill>
-                  <a:srgbClr val="0F766E"/>
+                  <a:srgbClr val="4C1D95"/>
                 </a:solidFill>
                 <a:latin typeface="Trebuchet MS" pitchFamily="34" charset="0"/>
                 <a:ea typeface="Trebuchet MS" pitchFamily="34" charset="-122"/>
                 <a:cs typeface="Trebuchet MS" pitchFamily="34" charset="-120"/>
               </a:rPr>
-              <a:t>pack</a:t>
+              <a:t>back</a:t>
             </a:r>
             <a:endParaRPr lang="en-US" sz="1300" dirty="0"/>
           </a:p>
@@ -29046,7 +29421,7 @@
                 <a:ea typeface="Calibri" pitchFamily="34" charset="-122"/>
                 <a:cs typeface="Calibri" pitchFamily="34" charset="-120"/>
               </a:rPr>
-              <a:t>bundle or group together</a:t>
+              <a:t>behind, on the back</a:t>
             </a:r>
             <a:endParaRPr lang="en-US" sz="850" dirty="0"/>
           </a:p>
@@ -29069,11 +29444,11 @@
             </a:avLst>
           </a:prstGeom>
           <a:solidFill>
-            <a:srgbClr val="FCE7F3"/>
+            <a:srgbClr val="CCFBF1"/>
           </a:solidFill>
           <a:ln w="19050">
             <a:solidFill>
-              <a:srgbClr val="DB2777"/>
+              <a:srgbClr val="0D9488"/>
             </a:solidFill>
             <a:prstDash val="solid"/>
           </a:ln>
@@ -29113,13 +29488,13 @@
             <a:r>
               <a:rPr lang="en-US" sz="1300" b="1" dirty="0">
                 <a:solidFill>
-                  <a:srgbClr val="9D174D"/>
+                  <a:srgbClr val="0F766E"/>
                 </a:solidFill>
                 <a:latin typeface="Trebuchet MS" pitchFamily="34" charset="0"/>
                 <a:ea typeface="Trebuchet MS" pitchFamily="34" charset="-122"/>
                 <a:cs typeface="Trebuchet MS" pitchFamily="34" charset="-120"/>
               </a:rPr>
-              <a:t>age</a:t>
+              <a:t>pack</a:t>
             </a:r>
             <a:endParaRPr lang="en-US" sz="1300" dirty="0"/>
           </a:p>
@@ -29158,7 +29533,7 @@
                 <a:ea typeface="Calibri" pitchFamily="34" charset="-122"/>
                 <a:cs typeface="Calibri" pitchFamily="34" charset="-120"/>
               </a:rPr>
-              <a:t>result or collection of</a:t>
+              <a:t>bundle, fill tightly</a:t>
             </a:r>
             <a:endParaRPr lang="en-US" sz="850" dirty="0"/>
           </a:p>
@@ -29317,7 +29692,7 @@
                 <a:ea typeface="Trebuchet MS" pitchFamily="34" charset="-122"/>
                 <a:cs typeface="Trebuchet MS" pitchFamily="34" charset="-120"/>
               </a:rPr>
-              <a:t>pack</a:t>
+              <a:t>back</a:t>
             </a:r>
             <a:endParaRPr lang="en-US" sz="1400" dirty="0"/>
           </a:p>
@@ -29422,7 +29797,7 @@
                 <a:ea typeface="Trebuchet MS" pitchFamily="34" charset="-122"/>
                 <a:cs typeface="Trebuchet MS" pitchFamily="34" charset="-120"/>
               </a:rPr>
-              <a:t>age</a:t>
+              <a:t>pack</a:t>
             </a:r>
             <a:endParaRPr lang="en-US" sz="1400" dirty="0"/>
           </a:p>
@@ -29846,7 +30221,7 @@
                 <a:ea typeface="Calibri" pitchFamily="34" charset="-122"/>
                 <a:cs typeface="Calibri" pitchFamily="34" charset="-120"/>
               </a:rPr>
-              <a:t>Word Labs  •  wordlabs.app  •  Root: 'pack' = bundle, wrap, or group together</a:t>
+              <a:t>Word Labs  •  wordlabs.app  •  Root: 'pack' = bundle, group, fill tightly</a:t>
             </a:r>
             <a:endParaRPr lang="en-US" sz="800" dirty="0"/>
           </a:p>
@@ -29985,7 +30360,7 @@
                 <a:ea typeface="Trebuchet MS" pitchFamily="34" charset="-122"/>
                 <a:cs typeface="Trebuchet MS" pitchFamily="34" charset="-120"/>
               </a:rPr>
-              <a:t>package</a:t>
+              <a:t>backpack</a:t>
             </a:r>
             <a:endParaRPr lang="en-US" sz="2800" dirty="0"/>
           </a:p>
@@ -30074,11 +30449,11 @@
             </a:avLst>
           </a:prstGeom>
           <a:solidFill>
-            <a:srgbClr val="CCFBF1"/>
+            <a:srgbClr val="DDD6FE"/>
           </a:solidFill>
           <a:ln w="19050">
             <a:solidFill>
-              <a:srgbClr val="0D9488"/>
+              <a:srgbClr val="7C3AED"/>
             </a:solidFill>
             <a:prstDash val="solid"/>
           </a:ln>
@@ -30118,13 +30493,13 @@
             <a:r>
               <a:rPr lang="en-US" sz="1300" b="1" dirty="0">
                 <a:solidFill>
-                  <a:srgbClr val="0F766E"/>
+                  <a:srgbClr val="4C1D95"/>
                 </a:solidFill>
                 <a:latin typeface="Trebuchet MS" pitchFamily="34" charset="0"/>
                 <a:ea typeface="Trebuchet MS" pitchFamily="34" charset="-122"/>
                 <a:cs typeface="Trebuchet MS" pitchFamily="34" charset="-120"/>
               </a:rPr>
-              <a:t>pack</a:t>
+              <a:t>back</a:t>
             </a:r>
             <a:endParaRPr lang="en-US" sz="1300" dirty="0"/>
           </a:p>
@@ -30163,7 +30538,7 @@
                 <a:ea typeface="Calibri" pitchFamily="34" charset="-122"/>
                 <a:cs typeface="Calibri" pitchFamily="34" charset="-120"/>
               </a:rPr>
-              <a:t>bundle or group together</a:t>
+              <a:t>behind, on the back</a:t>
             </a:r>
             <a:endParaRPr lang="en-US" sz="850" dirty="0"/>
           </a:p>
@@ -30186,11 +30561,11 @@
             </a:avLst>
           </a:prstGeom>
           <a:solidFill>
-            <a:srgbClr val="FCE7F3"/>
+            <a:srgbClr val="CCFBF1"/>
           </a:solidFill>
           <a:ln w="19050">
             <a:solidFill>
-              <a:srgbClr val="DB2777"/>
+              <a:srgbClr val="0D9488"/>
             </a:solidFill>
             <a:prstDash val="solid"/>
           </a:ln>
@@ -30230,13 +30605,13 @@
             <a:r>
               <a:rPr lang="en-US" sz="1300" b="1" dirty="0">
                 <a:solidFill>
-                  <a:srgbClr val="9D174D"/>
+                  <a:srgbClr val="0F766E"/>
                 </a:solidFill>
                 <a:latin typeface="Trebuchet MS" pitchFamily="34" charset="0"/>
                 <a:ea typeface="Trebuchet MS" pitchFamily="34" charset="-122"/>
                 <a:cs typeface="Trebuchet MS" pitchFamily="34" charset="-120"/>
               </a:rPr>
-              <a:t>age</a:t>
+              <a:t>pack</a:t>
             </a:r>
             <a:endParaRPr lang="en-US" sz="1300" dirty="0"/>
           </a:p>
@@ -30275,7 +30650,7 @@
                 <a:ea typeface="Calibri" pitchFamily="34" charset="-122"/>
                 <a:cs typeface="Calibri" pitchFamily="34" charset="-120"/>
               </a:rPr>
-              <a:t>result or collection of</a:t>
+              <a:t>bundle, fill tightly</a:t>
             </a:r>
             <a:endParaRPr lang="en-US" sz="850" dirty="0"/>
           </a:p>
@@ -30434,7 +30809,7 @@
                 <a:ea typeface="Trebuchet MS" pitchFamily="34" charset="-122"/>
                 <a:cs typeface="Trebuchet MS" pitchFamily="34" charset="-120"/>
               </a:rPr>
-              <a:t>pack</a:t>
+              <a:t>back</a:t>
             </a:r>
             <a:endParaRPr lang="en-US" sz="1400" dirty="0"/>
           </a:p>
@@ -30539,7 +30914,7 @@
                 <a:ea typeface="Trebuchet MS" pitchFamily="34" charset="-122"/>
                 <a:cs typeface="Trebuchet MS" pitchFamily="34" charset="-120"/>
               </a:rPr>
-              <a:t>age</a:t>
+              <a:t>pack</a:t>
             </a:r>
             <a:endParaRPr lang="en-US" sz="1400" dirty="0"/>
           </a:p>
@@ -30620,11 +30995,11 @@
         <p:spPr>
           <a:xfrm>
             <a:off x="1874520" y="4096512"/>
-            <a:ext cx="6903720" cy="804672"/>
+            <a:ext cx="6903720" cy="658368"/>
           </a:xfrm>
           <a:prstGeom prst="rect">
             <a:avLst>
-              <a:gd name="adj" fmla="val 6818"/>
+              <a:gd name="adj" fmla="val 8333"/>
             </a:avLst>
           </a:prstGeom>
           <a:solidFill>
@@ -30646,12 +31021,12 @@
         </p:nvSpPr>
         <p:spPr>
           <a:xfrm>
-            <a:off x="2427732" y="4169664"/>
-            <a:ext cx="685800" cy="384048"/>
+            <a:off x="2254649" y="4169664"/>
+            <a:ext cx="685800" cy="475488"/>
           </a:xfrm>
           <a:prstGeom prst="rect">
             <a:avLst>
-              <a:gd name="adj" fmla="val 9524"/>
+              <a:gd name="adj" fmla="val 7692"/>
             </a:avLst>
           </a:prstGeom>
           <a:solidFill>
@@ -30673,8 +31048,8 @@
         </p:nvSpPr>
         <p:spPr>
           <a:xfrm>
-            <a:off x="2427732" y="4169664"/>
-            <a:ext cx="685800" cy="384048"/>
+            <a:off x="2254649" y="4169664"/>
+            <a:ext cx="685800" cy="475488"/>
           </a:xfrm>
           <a:prstGeom prst="rect">
             <a:avLst/>
@@ -30698,7 +31073,7 @@
                 <a:ea typeface="Trebuchet MS" pitchFamily="34" charset="-122"/>
                 <a:cs typeface="Trebuchet MS" pitchFamily="34" charset="-120"/>
               </a:rPr>
-              <a:t>p</a:t>
+              <a:t>b</a:t>
             </a:r>
             <a:endParaRPr lang="en-US" sz="900" dirty="0"/>
           </a:p>
@@ -30712,12 +31087,12 @@
         </p:nvSpPr>
         <p:spPr>
           <a:xfrm>
-            <a:off x="3639312" y="4169664"/>
-            <a:ext cx="685800" cy="384048"/>
+            <a:off x="3293146" y="4169664"/>
+            <a:ext cx="685800" cy="475488"/>
           </a:xfrm>
           <a:prstGeom prst="rect">
             <a:avLst>
-              <a:gd name="adj" fmla="val 9524"/>
+              <a:gd name="adj" fmla="val 7692"/>
             </a:avLst>
           </a:prstGeom>
           <a:solidFill>
@@ -30739,8 +31114,8 @@
         </p:nvSpPr>
         <p:spPr>
           <a:xfrm>
-            <a:off x="3639312" y="4169664"/>
-            <a:ext cx="685800" cy="384048"/>
+            <a:off x="3293146" y="4169664"/>
+            <a:ext cx="685800" cy="475488"/>
           </a:xfrm>
           <a:prstGeom prst="rect">
             <a:avLst/>
@@ -30778,12 +31153,12 @@
         </p:nvSpPr>
         <p:spPr>
           <a:xfrm>
-            <a:off x="4850892" y="4169664"/>
-            <a:ext cx="685800" cy="384048"/>
+            <a:off x="4331643" y="4169664"/>
+            <a:ext cx="685800" cy="475488"/>
           </a:xfrm>
           <a:prstGeom prst="rect">
             <a:avLst>
-              <a:gd name="adj" fmla="val 9524"/>
+              <a:gd name="adj" fmla="val 7692"/>
             </a:avLst>
           </a:prstGeom>
           <a:solidFill>
@@ -30805,8 +31180,8 @@
         </p:nvSpPr>
         <p:spPr>
           <a:xfrm>
-            <a:off x="4850892" y="4169664"/>
-            <a:ext cx="685800" cy="384048"/>
+            <a:off x="4331643" y="4169664"/>
+            <a:ext cx="685800" cy="475488"/>
           </a:xfrm>
           <a:prstGeom prst="rect">
             <a:avLst/>
@@ -30844,12 +31219,12 @@
         </p:nvSpPr>
         <p:spPr>
           <a:xfrm>
-            <a:off x="6062472" y="4169664"/>
-            <a:ext cx="685800" cy="384048"/>
+            <a:off x="5370141" y="4169664"/>
+            <a:ext cx="685800" cy="475488"/>
           </a:xfrm>
           <a:prstGeom prst="rect">
             <a:avLst>
-              <a:gd name="adj" fmla="val 9524"/>
+              <a:gd name="adj" fmla="val 7692"/>
             </a:avLst>
           </a:prstGeom>
           <a:solidFill>
@@ -30871,8 +31246,8 @@
         </p:nvSpPr>
         <p:spPr>
           <a:xfrm>
-            <a:off x="6062472" y="4169664"/>
-            <a:ext cx="685800" cy="384048"/>
+            <a:off x="5370141" y="4169664"/>
+            <a:ext cx="685800" cy="475488"/>
           </a:xfrm>
           <a:prstGeom prst="rect">
             <a:avLst/>
@@ -30896,7 +31271,7 @@
                 <a:ea typeface="Trebuchet MS" pitchFamily="34" charset="-122"/>
                 <a:cs typeface="Trebuchet MS" pitchFamily="34" charset="-120"/>
               </a:rPr>
-              <a:t>a</a:t>
+              <a:t>p</a:t>
             </a:r>
             <a:endParaRPr lang="en-US" sz="900" dirty="0"/>
           </a:p>
@@ -30910,12 +31285,12 @@
         </p:nvSpPr>
         <p:spPr>
           <a:xfrm>
-            <a:off x="7274052" y="4169664"/>
-            <a:ext cx="685800" cy="384048"/>
+            <a:off x="6408638" y="4169664"/>
+            <a:ext cx="685800" cy="475488"/>
           </a:xfrm>
           <a:prstGeom prst="rect">
             <a:avLst>
-              <a:gd name="adj" fmla="val 9524"/>
+              <a:gd name="adj" fmla="val 7692"/>
             </a:avLst>
           </a:prstGeom>
           <a:solidFill>
@@ -30937,8 +31312,8 @@
         </p:nvSpPr>
         <p:spPr>
           <a:xfrm>
-            <a:off x="7274052" y="4169664"/>
-            <a:ext cx="685800" cy="384048"/>
+            <a:off x="6408638" y="4169664"/>
+            <a:ext cx="685800" cy="475488"/>
           </a:xfrm>
           <a:prstGeom prst="rect">
             <a:avLst/>
@@ -30962,7 +31337,7 @@
                 <a:ea typeface="Trebuchet MS" pitchFamily="34" charset="-122"/>
                 <a:cs typeface="Trebuchet MS" pitchFamily="34" charset="-120"/>
               </a:rPr>
-              <a:t>ge</a:t>
+              <a:t>a</a:t>
             </a:r>
             <a:endParaRPr lang="en-US" sz="900" dirty="0"/>
           </a:p>
@@ -30970,40 +31345,67 @@
       </p:sp>
       <p:sp>
         <p:nvSpPr>
-          <p:cNvPr id="43" name="Text 41"/>
-          <p:cNvSpPr/>
-          <p:nvPr/>
-        </p:nvSpPr>
-        <p:spPr>
-          <a:xfrm>
-            <a:off x="7274052" y="4572000"/>
-            <a:ext cx="685800" cy="219456"/>
-          </a:xfrm>
-          <a:prstGeom prst="rect">
-            <a:avLst/>
-          </a:prstGeom>
-          <a:noFill/>
-          <a:ln/>
-        </p:spPr>
-        <p:txBody>
-          <a:bodyPr wrap="square" lIns="0" tIns="0" rIns="0" bIns="0" rtlCol="0" anchor="t"/>
-          <a:lstStyle/>
-          <a:p>
-            <a:pPr algn="ctr" indent="0" marL="0">
-              <a:buNone/>
-            </a:pPr>
-            <a:r>
-              <a:rPr lang="en-US" sz="750" i="1" dirty="0">
-                <a:solidFill>
-                  <a:srgbClr val="94A3B8"/>
-                </a:solidFill>
-                <a:latin typeface="Calibri" pitchFamily="34" charset="0"/>
-                <a:ea typeface="Calibri" pitchFamily="34" charset="-122"/>
-                <a:cs typeface="Calibri" pitchFamily="34" charset="-120"/>
-              </a:rPr>
-              <a:t>/j/</a:t>
-            </a:r>
-            <a:endParaRPr lang="en-US" sz="750" dirty="0"/>
+          <p:cNvPr id="43" name="Shape 41"/>
+          <p:cNvSpPr/>
+          <p:nvPr/>
+        </p:nvSpPr>
+        <p:spPr>
+          <a:xfrm>
+            <a:off x="7447135" y="4169664"/>
+            <a:ext cx="685800" cy="475488"/>
+          </a:xfrm>
+          <a:prstGeom prst="rect">
+            <a:avLst>
+              <a:gd name="adj" fmla="val 7692"/>
+            </a:avLst>
+          </a:prstGeom>
+          <a:solidFill>
+            <a:srgbClr val="FFFFFF"/>
+          </a:solidFill>
+          <a:ln w="12700">
+            <a:solidFill>
+              <a:srgbClr val="DB2777"/>
+            </a:solidFill>
+            <a:prstDash val="solid"/>
+          </a:ln>
+        </p:spPr>
+      </p:sp>
+      <p:sp>
+        <p:nvSpPr>
+          <p:cNvPr id="44" name="Text 42"/>
+          <p:cNvSpPr/>
+          <p:nvPr/>
+        </p:nvSpPr>
+        <p:spPr>
+          <a:xfrm>
+            <a:off x="7447135" y="4169664"/>
+            <a:ext cx="685800" cy="475488"/>
+          </a:xfrm>
+          <a:prstGeom prst="rect">
+            <a:avLst/>
+          </a:prstGeom>
+          <a:noFill/>
+          <a:ln/>
+        </p:spPr>
+        <p:txBody>
+          <a:bodyPr wrap="square" lIns="0" tIns="0" rIns="0" bIns="0" rtlCol="0" anchor="ctr"/>
+          <a:lstStyle/>
+          <a:p>
+            <a:pPr algn="ctr" indent="0" marL="0">
+              <a:buNone/>
+            </a:pPr>
+            <a:r>
+              <a:rPr lang="en-US" sz="900" b="1" dirty="0">
+                <a:solidFill>
+                  <a:srgbClr val="9D174D"/>
+                </a:solidFill>
+                <a:latin typeface="Trebuchet MS" pitchFamily="34" charset="0"/>
+                <a:ea typeface="Trebuchet MS" pitchFamily="34" charset="-122"/>
+                <a:cs typeface="Trebuchet MS" pitchFamily="34" charset="-120"/>
+              </a:rPr>
+              <a:t>ck</a:t>
+            </a:r>
+            <a:endParaRPr lang="en-US" sz="900" dirty="0"/>
           </a:p>
         </p:txBody>
       </p:sp>
@@ -31293,7 +31695,7 @@
                 <a:ea typeface="Calibri" pitchFamily="34" charset="-122"/>
                 <a:cs typeface="Calibri" pitchFamily="34" charset="-120"/>
               </a:rPr>
-              <a:t>Word Labs  •  wordlabs.app  •  Root: 'pack' = bundle, wrap, or group together</a:t>
+              <a:t>Word Labs  •  wordlabs.app  •  Root: 'pack' = bundle, group, fill tightly</a:t>
             </a:r>
             <a:endParaRPr lang="en-US" sz="800" dirty="0"/>
           </a:p>
@@ -32462,7 +32864,7 @@
                 <a:ea typeface="Calibri" pitchFamily="34" charset="-122"/>
                 <a:cs typeface="Calibri" pitchFamily="34" charset="-120"/>
               </a:rPr>
-              <a:t>Word Labs  •  wordlabs.app  •  Root: 'pack' = bundle, wrap, or group together</a:t>
+              <a:t>Word Labs  •  wordlabs.app  •  Root: 'pack' = bundle, group, fill tightly</a:t>
             </a:r>
             <a:endParaRPr lang="en-US" sz="800" dirty="0"/>
           </a:p>
@@ -32763,7 +33165,7 @@
                 <a:ea typeface="Trebuchet MS" pitchFamily="34" charset="-122"/>
                 <a:cs typeface="Trebuchet MS" pitchFamily="34" charset="-120"/>
               </a:rPr>
-              <a:t>un-</a:t>
+              <a:t>back-</a:t>
             </a:r>
             <a:endParaRPr lang="en-US" sz="1300" dirty="0"/>
           </a:p>
@@ -32955,7 +33357,7 @@
                 <a:ea typeface="Trebuchet MS" pitchFamily="34" charset="-122"/>
                 <a:cs typeface="Trebuchet MS" pitchFamily="34" charset="-120"/>
               </a:rPr>
-              <a:t>re-</a:t>
+              <a:t>un-</a:t>
             </a:r>
             <a:endParaRPr lang="en-US" sz="1300" dirty="0"/>
           </a:p>
@@ -33108,7 +33510,7 @@
                 <a:ea typeface="Trebuchet MS" pitchFamily="34" charset="-122"/>
                 <a:cs typeface="Trebuchet MS" pitchFamily="34" charset="-120"/>
               </a:rPr>
-              <a:t>back-</a:t>
+              <a:t>re-</a:t>
             </a:r>
             <a:endParaRPr lang="en-US" sz="1300" dirty="0"/>
           </a:p>
@@ -33414,7 +33816,7 @@
                 <a:ea typeface="Trebuchet MS" pitchFamily="34" charset="-122"/>
                 <a:cs typeface="Trebuchet MS" pitchFamily="34" charset="-120"/>
               </a:rPr>
-              <a:t>six-</a:t>
+              <a:t>knap-</a:t>
             </a:r>
             <a:endParaRPr lang="en-US" sz="1300" dirty="0"/>
           </a:p>
@@ -34362,7 +34764,7 @@
                 <a:ea typeface="Calibri" pitchFamily="34" charset="-122"/>
                 <a:cs typeface="Calibri" pitchFamily="34" charset="-120"/>
               </a:rPr>
-              <a:t>Word Labs  •  wordlabs.app  •  Root: 'pack' = bundle, wrap, or group together</a:t>
+              <a:t>Word Labs  •  wordlabs.app  •  Root: 'pack' = bundle, group, fill tightly</a:t>
             </a:r>
             <a:endParaRPr lang="en-US" sz="800" dirty="0"/>
           </a:p>
@@ -34526,7 +34928,7 @@
                 <a:ea typeface="Calibri" pitchFamily="34" charset="-122"/>
                 <a:cs typeface="Calibri" pitchFamily="34" charset="-120"/>
               </a:rPr>
-              <a:t>The core part of a word carrying its basic meaning. For example, 'pack' means 'bundle, wrap, or group together'.</a:t>
+              <a:t>The core part of a word carrying its basic meaning. For example, 'pack' means 'bundle, group, fill tightly'.</a:t>
             </a:r>
             <a:endParaRPr lang="en-US" sz="1350" dirty="0"/>
           </a:p>
@@ -35146,7 +35548,7 @@
                 <a:ea typeface="Calibri" pitchFamily="34" charset="-122"/>
                 <a:cs typeface="Calibri" pitchFamily="34" charset="-120"/>
               </a:rPr>
-              <a:t>Word Labs  •  wordlabs.app  •  Root: 'pack' = bundle, wrap, or group together</a:t>
+              <a:t>Word Labs  •  wordlabs.app  •  Root: 'pack' = bundle, group, fill tightly</a:t>
             </a:r>
             <a:endParaRPr lang="en-US" sz="800" dirty="0"/>
           </a:p>
@@ -35258,7 +35660,7 @@
                 <a:ea typeface="Calibri" pitchFamily="34" charset="-122"/>
                 <a:cs typeface="Calibri" pitchFamily="34" charset="-120"/>
               </a:rPr>
-              <a:t>1.  The word 'backpack' contains the root 'pack' meaning to bundle or carry things together.</a:t>
+              <a:t>1.  The word 'unpacked' has a prefix, a root, and a suffix.</a:t>
             </a:r>
             <a:endParaRPr lang="en-US" sz="1300" dirty="0"/>
           </a:p>
@@ -35397,7 +35799,7 @@
                 <a:ea typeface="Calibri" pitchFamily="34" charset="-122"/>
                 <a:cs typeface="Calibri" pitchFamily="34" charset="-120"/>
               </a:rPr>
-              <a:t>2.  The word 'packet' means a very large box used to ship heavy furniture.</a:t>
+              <a:t>2.  The root 'pack' means to scatter or spread things out.</a:t>
             </a:r>
             <a:endParaRPr lang="en-US" sz="1300" dirty="0"/>
           </a:p>
@@ -35536,7 +35938,7 @@
                 <a:ea typeface="Calibri" pitchFamily="34" charset="-122"/>
                 <a:cs typeface="Calibri" pitchFamily="34" charset="-120"/>
               </a:rPr>
-              <a:t>3.  The suffix '-age' can be added to 'pack' to make the word 'package'.</a:t>
+              <a:t>3.  A 'packet' is a small item related to packing or bundling things.</a:t>
             </a:r>
             <a:endParaRPr lang="en-US" sz="1300" dirty="0"/>
           </a:p>
@@ -35675,7 +36077,7 @@
                 <a:ea typeface="Calibri" pitchFamily="34" charset="-122"/>
                 <a:cs typeface="Calibri" pitchFamily="34" charset="-120"/>
               </a:rPr>
-              <a:t>4.  The prefix 'un-' in 'unpack' means to reverse or undo the action of packing.</a:t>
+              <a:t>4.  The suffix '-er' in 'packer' means to do something again.</a:t>
             </a:r>
             <a:endParaRPr lang="en-US" sz="1300" dirty="0"/>
           </a:p>
@@ -35698,11 +36100,11 @@
             </a:avLst>
           </a:prstGeom>
           <a:solidFill>
-            <a:srgbClr val="DCFCE7"/>
-          </a:solidFill>
-          <a:ln w="12700">
-            <a:solidFill>
-              <a:srgbClr val="16A34A"/>
+            <a:srgbClr val="FEE2E2"/>
+          </a:solidFill>
+          <a:ln w="12700">
+            <a:solidFill>
+              <a:srgbClr val="DC2626"/>
             </a:solidFill>
             <a:prstDash val="solid"/>
           </a:ln>
@@ -35735,13 +36137,13 @@
             <a:r>
               <a:rPr lang="en-US" sz="1100" b="1" dirty="0">
                 <a:solidFill>
-                  <a:srgbClr val="16A34A"/>
+                  <a:srgbClr val="DC2626"/>
                 </a:solidFill>
                 <a:latin typeface="Trebuchet MS" pitchFamily="34" charset="0"/>
                 <a:ea typeface="Trebuchet MS" pitchFamily="34" charset="-122"/>
                 <a:cs typeface="Trebuchet MS" pitchFamily="34" charset="-120"/>
               </a:rPr>
-              <a:t>TRUE</a:t>
+              <a:t>FALSE</a:t>
             </a:r>
             <a:endParaRPr lang="en-US" sz="1100" dirty="0"/>
           </a:p>
@@ -35814,7 +36216,7 @@
                 <a:ea typeface="Calibri" pitchFamily="34" charset="-122"/>
                 <a:cs typeface="Calibri" pitchFamily="34" charset="-120"/>
               </a:rPr>
-              <a:t>5.  The root 'pack' comes from the Ancient Greek word for 'water'.</a:t>
+              <a:t>5.  The word 'backpack' contains the root 'pack'.</a:t>
             </a:r>
             <a:endParaRPr lang="en-US" sz="1300" dirty="0"/>
           </a:p>
@@ -35837,11 +36239,11 @@
             </a:avLst>
           </a:prstGeom>
           <a:solidFill>
-            <a:srgbClr val="FEE2E2"/>
-          </a:solidFill>
-          <a:ln w="12700">
-            <a:solidFill>
-              <a:srgbClr val="DC2626"/>
+            <a:srgbClr val="DCFCE7"/>
+          </a:solidFill>
+          <a:ln w="12700">
+            <a:solidFill>
+              <a:srgbClr val="16A34A"/>
             </a:solidFill>
             <a:prstDash val="solid"/>
           </a:ln>
@@ -35874,13 +36276,13 @@
             <a:r>
               <a:rPr lang="en-US" sz="1100" b="1" dirty="0">
                 <a:solidFill>
-                  <a:srgbClr val="DC2626"/>
+                  <a:srgbClr val="16A34A"/>
                 </a:solidFill>
                 <a:latin typeface="Trebuchet MS" pitchFamily="34" charset="0"/>
                 <a:ea typeface="Trebuchet MS" pitchFamily="34" charset="-122"/>
                 <a:cs typeface="Trebuchet MS" pitchFamily="34" charset="-120"/>
               </a:rPr>
-              <a:t>FALSE</a:t>
+              <a:t>TRUE</a:t>
             </a:r>
             <a:endParaRPr lang="en-US" sz="1100" dirty="0"/>
           </a:p>
@@ -36172,7 +36574,7 @@
                 <a:ea typeface="Calibri" pitchFamily="34" charset="-122"/>
                 <a:cs typeface="Calibri" pitchFamily="34" charset="-120"/>
               </a:rPr>
-              <a:t>Word Labs  •  wordlabs.app  •  Root: 'pack' = bundle, wrap, or group together</a:t>
+              <a:t>Word Labs  •  wordlabs.app  •  Root: 'pack' = bundle, group, fill tightly</a:t>
             </a:r>
             <a:endParaRPr lang="en-US" sz="800" dirty="0"/>
           </a:p>
@@ -36309,7 +36711,7 @@
                 <a:ea typeface="Trebuchet MS" pitchFamily="34" charset="-122"/>
                 <a:cs typeface="Trebuchet MS" pitchFamily="34" charset="-120"/>
               </a:rPr>
-              <a:t>bundle, wrap, or group together</a:t>
+              <a:t>bundle, group, fill tightly</a:t>
             </a:r>
             <a:endParaRPr lang="en-US" sz="2000" dirty="0"/>
           </a:p>
@@ -36348,7 +36750,7 @@
                 <a:ea typeface="Calibri" pitchFamily="34" charset="-122"/>
                 <a:cs typeface="Calibri" pitchFamily="34" charset="-120"/>
               </a:rPr>
-              <a:t>Origin: Latin: pactus</a:t>
+              <a:t>Origin: Latin: paccus</a:t>
             </a:r>
             <a:endParaRPr lang="en-US" sz="1100" dirty="0"/>
           </a:p>
@@ -37141,7 +37543,7 @@
                 <a:ea typeface="Calibri" pitchFamily="34" charset="-122"/>
                 <a:cs typeface="Calibri" pitchFamily="34" charset="-120"/>
               </a:rPr>
-              <a:t>Word Labs  •  wordlabs.app  •  Root: 'pack' = bundle, wrap, or group together</a:t>
+              <a:t>Word Labs  •  wordlabs.app  •  Root: 'pack' = bundle, group, fill tightly</a:t>
             </a:r>
             <a:endParaRPr lang="en-US" sz="800" dirty="0"/>
           </a:p>
@@ -37442,7 +37844,7 @@
                 <a:ea typeface="Trebuchet MS" pitchFamily="34" charset="-122"/>
                 <a:cs typeface="Trebuchet MS" pitchFamily="34" charset="-120"/>
               </a:rPr>
-              <a:t>un-</a:t>
+              <a:t>back-</a:t>
             </a:r>
             <a:endParaRPr lang="en-US" sz="1300" dirty="0"/>
           </a:p>
@@ -37634,7 +38036,7 @@
                 <a:ea typeface="Trebuchet MS" pitchFamily="34" charset="-122"/>
                 <a:cs typeface="Trebuchet MS" pitchFamily="34" charset="-120"/>
               </a:rPr>
-              <a:t>re-</a:t>
+              <a:t>un-</a:t>
             </a:r>
             <a:endParaRPr lang="en-US" sz="1300" dirty="0"/>
           </a:p>
@@ -37787,7 +38189,7 @@
                 <a:ea typeface="Trebuchet MS" pitchFamily="34" charset="-122"/>
                 <a:cs typeface="Trebuchet MS" pitchFamily="34" charset="-120"/>
               </a:rPr>
-              <a:t>back-</a:t>
+              <a:t>re-</a:t>
             </a:r>
             <a:endParaRPr lang="en-US" sz="1300" dirty="0"/>
           </a:p>
@@ -38093,7 +38495,7 @@
                 <a:ea typeface="Trebuchet MS" pitchFamily="34" charset="-122"/>
                 <a:cs typeface="Trebuchet MS" pitchFamily="34" charset="-120"/>
               </a:rPr>
-              <a:t>six-</a:t>
+              <a:t>knap-</a:t>
             </a:r>
             <a:endParaRPr lang="en-US" sz="1300" dirty="0"/>
           </a:p>
@@ -38236,7 +38638,7 @@
         <p:spPr>
           <a:xfrm>
             <a:off x="1508760" y="4178808"/>
-            <a:ext cx="822960" cy="420624"/>
+            <a:ext cx="1097280" cy="420624"/>
           </a:xfrm>
           <a:prstGeom prst="rect">
             <a:avLst>
@@ -38270,7 +38672,7 @@
         <p:spPr>
           <a:xfrm>
             <a:off x="1508760" y="4178808"/>
-            <a:ext cx="822960" cy="420624"/>
+            <a:ext cx="1097280" cy="420624"/>
           </a:xfrm>
           <a:prstGeom prst="rect">
             <a:avLst/>
@@ -38294,7 +38696,7 @@
                 <a:ea typeface="Trebuchet MS" pitchFamily="34" charset="-122"/>
                 <a:cs typeface="Trebuchet MS" pitchFamily="34" charset="-120"/>
               </a:rPr>
-              <a:t>un-</a:t>
+              <a:t>back-</a:t>
             </a:r>
             <a:endParaRPr lang="en-US" sz="1300" dirty="0"/>
           </a:p>
@@ -38308,7 +38710,7 @@
         </p:nvSpPr>
         <p:spPr>
           <a:xfrm>
-            <a:off x="2359152" y="4178808"/>
+            <a:off x="2633472" y="4178808"/>
             <a:ext cx="320040" cy="420624"/>
           </a:xfrm>
           <a:prstGeom prst="rect">
@@ -38347,7 +38749,7 @@
         </p:nvSpPr>
         <p:spPr>
           <a:xfrm>
-            <a:off x="2706624" y="4178808"/>
+            <a:off x="2980944" y="4178808"/>
             <a:ext cx="1243584" cy="420624"/>
           </a:xfrm>
           <a:prstGeom prst="rect">
@@ -38381,7 +38783,7 @@
         </p:nvSpPr>
         <p:spPr>
           <a:xfrm>
-            <a:off x="2706624" y="4178808"/>
+            <a:off x="2980944" y="4178808"/>
             <a:ext cx="1243584" cy="420624"/>
           </a:xfrm>
           <a:prstGeom prst="rect">
@@ -38420,7 +38822,7 @@
         </p:nvSpPr>
         <p:spPr>
           <a:xfrm>
-            <a:off x="3977640" y="4178808"/>
+            <a:off x="4251960" y="4178808"/>
             <a:ext cx="320040" cy="420624"/>
           </a:xfrm>
           <a:prstGeom prst="rect">
@@ -38459,7 +38861,7 @@
         </p:nvSpPr>
         <p:spPr>
           <a:xfrm>
-            <a:off x="4325112" y="4178808"/>
+            <a:off x="4599432" y="4178808"/>
             <a:ext cx="822960" cy="420624"/>
           </a:xfrm>
           <a:prstGeom prst="rect">
@@ -38493,7 +38895,7 @@
         </p:nvSpPr>
         <p:spPr>
           <a:xfrm>
-            <a:off x="4325112" y="4178808"/>
+            <a:off x="4599432" y="4178808"/>
             <a:ext cx="822960" cy="420624"/>
           </a:xfrm>
           <a:prstGeom prst="rect">
@@ -38532,7 +38934,7 @@
         </p:nvSpPr>
         <p:spPr>
           <a:xfrm>
-            <a:off x="5221224" y="4178808"/>
+            <a:off x="5495544" y="4178808"/>
             <a:ext cx="365760" cy="420624"/>
           </a:xfrm>
           <a:prstGeom prst="rect">
@@ -38571,7 +38973,7 @@
         </p:nvSpPr>
         <p:spPr>
           <a:xfrm>
-            <a:off x="5632704" y="4178808"/>
+            <a:off x="5907024" y="4178808"/>
             <a:ext cx="2194560" cy="420624"/>
           </a:xfrm>
           <a:prstGeom prst="rect">
@@ -38598,7 +39000,7 @@
         </p:nvSpPr>
         <p:spPr>
           <a:xfrm>
-            <a:off x="5632704" y="4178808"/>
+            <a:off x="5907024" y="4178808"/>
             <a:ext cx="2194560" cy="420624"/>
           </a:xfrm>
           <a:prstGeom prst="rect">
@@ -38915,7 +39317,7 @@
                 <a:ea typeface="Calibri" pitchFamily="34" charset="-122"/>
                 <a:cs typeface="Calibri" pitchFamily="34" charset="-120"/>
               </a:rPr>
-              <a:t>Word Labs  •  wordlabs.app  •  Root: 'pack' = bundle, wrap, or group together</a:t>
+              <a:t>Word Labs  •  wordlabs.app  •  Root: 'pack' = bundle, group, fill tightly</a:t>
             </a:r>
             <a:endParaRPr lang="en-US" sz="800" dirty="0"/>
           </a:p>
@@ -39093,7 +39495,7 @@
                 <a:ea typeface="Calibri" pitchFamily="34" charset="-122"/>
                 <a:cs typeface="Calibri" pitchFamily="34" charset="-120"/>
               </a:rPr>
-              <a:t>A person or machine that packs items into containers.</a:t>
+              <a:t>A person or machine that puts things into containers or boxes.</a:t>
             </a:r>
             <a:endParaRPr lang="en-US" sz="1200" dirty="0"/>
           </a:p>
@@ -39232,7 +39634,7 @@
                 <a:ea typeface="Calibri" pitchFamily="34" charset="-122"/>
                 <a:cs typeface="Calibri" pitchFamily="34" charset="-120"/>
               </a:rPr>
-              <a:t>A small pack or container holding a set amount of something.</a:t>
+              <a:t>A small container or bag holding a set amount of something.</a:t>
             </a:r>
             <a:endParaRPr lang="en-US" sz="1200" dirty="0"/>
           </a:p>
@@ -39371,7 +39773,7 @@
                 <a:ea typeface="Calibri" pitchFamily="34" charset="-122"/>
                 <a:cs typeface="Calibri" pitchFamily="34" charset="-120"/>
               </a:rPr>
-              <a:t>Filled up tightly with things, or very crowded.</a:t>
+              <a:t>Filled up tightly with things, or very crowded with people.</a:t>
             </a:r>
             <a:endParaRPr lang="en-US" sz="1200" dirty="0"/>
           </a:p>
@@ -39510,7 +39912,7 @@
                 <a:ea typeface="Calibri" pitchFamily="34" charset="-122"/>
                 <a:cs typeface="Calibri" pitchFamily="34" charset="-120"/>
               </a:rPr>
-              <a:t>A bag you wear on your back to carry your belongings.</a:t>
+              <a:t>A bag with straps that you carry on your back to school or hiking.</a:t>
             </a:r>
             <a:endParaRPr lang="en-US" sz="1200" dirty="0"/>
           </a:p>
@@ -39649,7 +40051,7 @@
                 <a:ea typeface="Calibri" pitchFamily="34" charset="-122"/>
                 <a:cs typeface="Calibri" pitchFamily="34" charset="-120"/>
               </a:rPr>
-              <a:t>To take things out of a bag, box, or container.</a:t>
+              <a:t>To take things out of a bag, box, or suitcase.</a:t>
             </a:r>
             <a:endParaRPr lang="en-US" sz="1200" dirty="0"/>
           </a:p>
@@ -39788,7 +40190,7 @@
                 <a:ea typeface="Calibri" pitchFamily="34" charset="-122"/>
                 <a:cs typeface="Calibri" pitchFamily="34" charset="-120"/>
               </a:rPr>
-              <a:t>A wrapped or boxed item that is packed and ready to be sent or given.</a:t>
+              <a:t>A wrapped or boxed item, like a parcel sent in the mail.</a:t>
             </a:r>
             <a:endParaRPr lang="en-US" sz="1200" dirty="0"/>
           </a:p>
@@ -39927,7 +40329,7 @@
                 <a:ea typeface="Calibri" pitchFamily="34" charset="-122"/>
                 <a:cs typeface="Calibri" pitchFamily="34" charset="-120"/>
               </a:rPr>
-              <a:t>The act of putting things into bags, boxes, or containers.</a:t>
+              <a:t>Putting things carefully into a bag or box to take somewhere.</a:t>
             </a:r>
             <a:endParaRPr lang="en-US" sz="1200" dirty="0"/>
           </a:p>
@@ -40219,7 +40621,7 @@
                 <a:ea typeface="Calibri" pitchFamily="34" charset="-122"/>
                 <a:cs typeface="Calibri" pitchFamily="34" charset="-120"/>
               </a:rPr>
-              <a:t>Word Labs  •  wordlabs.app  •  Root: 'pack' = bundle, wrap, or group together</a:t>
+              <a:t>Word Labs  •  wordlabs.app  •  Root: 'pack' = bundle, group, fill tightly</a:t>
             </a:r>
             <a:endParaRPr lang="en-US" sz="800" dirty="0"/>
           </a:p>
@@ -40422,7 +40824,7 @@
                 <a:ea typeface="Calibri" pitchFamily="34" charset="-122"/>
                 <a:cs typeface="Calibri" pitchFamily="34" charset="-120"/>
               </a:rPr>
-              <a:t>Make sure you pack your lunchbox and water bottle before we leave for the excursion tomorrow.</a:t>
+              <a:t>She carefully packed her backpack the night before the school camping trip.</a:t>
             </a:r>
             <a:endParaRPr lang="en-US" sz="1500" dirty="0"/>
           </a:p>
@@ -40586,7 +40988,7 @@
                 <a:ea typeface="Calibri" pitchFamily="34" charset="-122"/>
                 <a:cs typeface="Calibri" pitchFamily="34" charset="-120"/>
               </a:rPr>
-              <a:t>The explorer wore a large backpack filled with supplies for the three-day hiking trip.</a:t>
+              <a:t>The packer at the warehouse sorted and sealed hundreds of packages each day.</a:t>
             </a:r>
             <a:endParaRPr lang="en-US" sz="1500" dirty="0"/>
           </a:p>
@@ -40750,7 +41152,7 @@
                 <a:ea typeface="Calibri" pitchFamily="34" charset="-122"/>
                 <a:cs typeface="Calibri" pitchFamily="34" charset="-120"/>
               </a:rPr>
-              <a:t>Mum asked us to unpack the shopping bags and put everything away in the kitchen cupboards.</a:t>
+              <a:t>Mum told us to unpack our bags as soon as we arrived at the holiday house.</a:t>
             </a:r>
             <a:endParaRPr lang="en-US" sz="1500" dirty="0"/>
           </a:p>
